--- a/project_37_traffic_violation/presentations/project_presentation.pptx
+++ b/project_37_traffic_violation/presentations/project_presentation.pptx
@@ -13,6 +13,13 @@
     <p:sldId id="261" r:id="rId12"/>
     <p:sldId id="262" r:id="rId13"/>
     <p:sldId id="263" r:id="rId14"/>
+    <p:sldId id="264" r:id="rId15"/>
+    <p:sldId id="265" r:id="rId16"/>
+    <p:sldId id="266" r:id="rId17"/>
+    <p:sldId id="267" r:id="rId18"/>
+    <p:sldId id="268" r:id="rId19"/>
+    <p:sldId id="269" r:id="rId20"/>
+    <p:sldId id="270" r:id="rId21"/>
   </p:sldIdLst>
   <p:sldSz cx="12191695" cy="6858000" type="screen4x3"/>
   <p:notesSz cx="6858000" cy="9144000"/>
@@ -3110,7 +3117,7 @@
             <a:avLst/>
           </a:prstGeom>
           <a:solidFill>
-            <a:srgbClr val="0F172A"/>
+            <a:srgbClr val="0A0E17"/>
           </a:solidFill>
           <a:ln>
             <a:noFill/>
@@ -3146,8 +3153,8 @@
         </p:nvSpPr>
         <p:spPr>
           <a:xfrm>
-            <a:off x="1097280" y="1645920"/>
-            <a:ext cx="10058400" cy="3474720"/>
+            <a:off x="914400" y="1828800"/>
+            <a:ext cx="10362895" cy="3200400"/>
           </a:xfrm>
           <a:prstGeom prst="rect">
             <a:avLst/>
@@ -3168,7 +3175,26 @@
               </a:defRPr>
             </a:pPr>
             <a:r>
-              <a:t>PROJECT 37 OF 55  •  RESEARCH &amp; IMPLEMENTATION DECK</a:t>
+              <a:t>COLLEGE CAPSTONE ENGINEERING PORTFOLIO • PROJECT-037</a:t>
+            </a:r>
+          </a:p>
+          <a:p>
+            <a:pPr>
+              <a:spcBef>
+                <a:spcPts val="1200"/>
+              </a:spcBef>
+              <a:defRPr sz="3600" b="1">
+                <a:solidFill>
+                  <a:srgbClr val="F8FAFC"/>
+                </a:solidFill>
+              </a:defRPr>
+            </a:pPr>
+            <a:r>
+              <a:t>AI Traffic Violation Detection &amp;</a:t>
+            </a:r>
+            <a:br/>
+            <a:r>
+              <a:t>ANPR Safety Enforcement System</a:t>
             </a:r>
           </a:p>
           <a:p>
@@ -3176,29 +3202,1946 @@
               <a:spcBef>
                 <a:spcPts val="1400"/>
               </a:spcBef>
-              <a:defRPr sz="3200" b="1">
-                <a:solidFill>
-                  <a:srgbClr val="FFFFFF"/>
-                </a:solidFill>
-              </a:defRPr>
-            </a:pPr>
-            <a:r>
-              <a:t>AI-BASED TRAFFIC VIOLATION DETECTION AND AUTOMATED LICENSE PLATE RECOGNITION SYSTEM</a:t>
-            </a:r>
-          </a:p>
-          <a:p>
-            <a:pPr>
-              <a:spcBef>
-                <a:spcPts val="1200"/>
-              </a:spcBef>
-              <a:defRPr sz="1600">
-                <a:solidFill>
-                  <a:srgbClr val="CBD5E1"/>
-                </a:solidFill>
-              </a:defRPr>
-            </a:pPr>
-            <a:r>
-              <a:t>Enterprise-Grade AI Architecture, Machine Learning Pipeline &amp; Deployment Framework</a:t>
+              <a:defRPr sz="1500">
+                <a:solidFill>
+                  <a:srgbClr val="F59E0B"/>
+                </a:solidFill>
+              </a:defRPr>
+            </a:pPr>
+            <a:r>
+              <a:t>PyTorch 2.x Deep Residual MLP · Multi-Target Safety Regressor · Statutory MVA E-Challans · Cryptographic Audit Ledger</a:t>
+            </a:r>
+          </a:p>
+        </p:txBody>
+      </p:sp>
+    </p:spTree>
+  </p:cSld>
+  <p:clrMapOvr>
+    <a:masterClrMapping/>
+  </p:clrMapOvr>
+</p:sld>
+</file>
+
+<file path=ppt/slides/slide10.xml><?xml version="1.0" encoding="utf-8"?>
+<p:sld xmlns:a="http://schemas.openxmlformats.org/drawingml/2006/main" xmlns:p="http://schemas.openxmlformats.org/presentationml/2006/main" xmlns:r="http://schemas.openxmlformats.org/officeDocument/2006/relationships">
+  <p:cSld>
+    <p:spTree>
+      <p:nvGrpSpPr>
+        <p:cNvPr id="1" name=""/>
+        <p:cNvGrpSpPr/>
+        <p:nvPr/>
+      </p:nvGrpSpPr>
+      <p:grpSpPr/>
+      <p:sp>
+        <p:nvSpPr>
+          <p:cNvPr id="2" name="Rectangle 1"/>
+          <p:cNvSpPr/>
+          <p:nvPr/>
+        </p:nvSpPr>
+        <p:spPr>
+          <a:xfrm>
+            <a:off x="0" y="0"/>
+            <a:ext cx="12191695" cy="6858000"/>
+          </a:xfrm>
+          <a:prstGeom prst="rect">
+            <a:avLst/>
+          </a:prstGeom>
+          <a:solidFill>
+            <a:srgbClr val="0A0E17"/>
+          </a:solidFill>
+          <a:ln>
+            <a:noFill/>
+          </a:ln>
+        </p:spPr>
+        <p:style>
+          <a:lnRef idx="1">
+            <a:schemeClr val="accent1"/>
+          </a:lnRef>
+          <a:fillRef idx="3">
+            <a:schemeClr val="accent1"/>
+          </a:fillRef>
+          <a:effectRef idx="2">
+            <a:schemeClr val="accent1"/>
+          </a:effectRef>
+          <a:fontRef idx="minor">
+            <a:schemeClr val="lt1"/>
+          </a:fontRef>
+        </p:style>
+        <p:txBody>
+          <a:bodyPr rtlCol="0" anchor="ctr"/>
+          <a:lstStyle/>
+          <a:p>
+            <a:pPr algn="ctr"/>
+          </a:p>
+        </p:txBody>
+      </p:sp>
+      <p:sp>
+        <p:nvSpPr>
+          <p:cNvPr id="3" name="TextBox 2"/>
+          <p:cNvSpPr txBox="1"/>
+          <p:nvPr/>
+        </p:nvSpPr>
+        <p:spPr>
+          <a:xfrm>
+            <a:off x="731520" y="365760"/>
+            <a:ext cx="10728655" cy="1005840"/>
+          </a:xfrm>
+          <a:prstGeom prst="rect">
+            <a:avLst/>
+          </a:prstGeom>
+          <a:noFill/>
+        </p:spPr>
+        <p:txBody>
+          <a:bodyPr wrap="square">
+            <a:spAutoFit/>
+          </a:bodyPr>
+          <a:lstStyle/>
+          <a:p>
+            <a:pPr>
+              <a:defRPr sz="1100" b="1">
+                <a:solidFill>
+                  <a:srgbClr val="38BDF8"/>
+                </a:solidFill>
+              </a:defRPr>
+            </a:pPr>
+            <a:r>
+              <a:t>INTELLIGENT TRANSPORTATION SYSTEMS • PROJECT-037</a:t>
+            </a:r>
+          </a:p>
+          <a:p>
+            <a:pPr>
+              <a:defRPr sz="2200" b="1">
+                <a:solidFill>
+                  <a:srgbClr val="F8FAFC"/>
+                </a:solidFill>
+              </a:defRPr>
+            </a:pPr>
+            <a:r>
+              <a:t>Multi-Intersection Corridor Switching &amp; Geofencing</a:t>
+            </a:r>
+          </a:p>
+        </p:txBody>
+      </p:sp>
+      <p:pic>
+        <p:nvPicPr>
+          <p:cNvPr id="4" name="Picture 3" descr="03_intersection_selection_corridor.png"/>
+          <p:cNvPicPr>
+            <a:picLocks noChangeAspect="1"/>
+          </p:cNvPicPr>
+          <p:nvPr/>
+        </p:nvPicPr>
+        <p:blipFill>
+          <a:blip r:embed="rId2"/>
+          <a:stretch>
+            <a:fillRect/>
+          </a:stretch>
+        </p:blipFill>
+        <p:spPr>
+          <a:xfrm>
+            <a:off x="731520" y="1645920"/>
+            <a:ext cx="6217920" cy="4389120"/>
+          </a:xfrm>
+          <a:prstGeom prst="rect">
+            <a:avLst/>
+          </a:prstGeom>
+        </p:spPr>
+      </p:pic>
+      <p:sp>
+        <p:nvSpPr>
+          <p:cNvPr id="5" name="TextBox 4"/>
+          <p:cNvSpPr txBox="1"/>
+          <p:nvPr/>
+        </p:nvSpPr>
+        <p:spPr>
+          <a:xfrm>
+            <a:off x="731520" y="6080759"/>
+            <a:ext cx="6217920" cy="365760"/>
+          </a:xfrm>
+          <a:prstGeom prst="rect">
+            <a:avLst/>
+          </a:prstGeom>
+          <a:noFill/>
+        </p:spPr>
+        <p:txBody>
+          <a:bodyPr wrap="none">
+            <a:spAutoFit/>
+          </a:bodyPr>
+          <a:lstStyle/>
+          <a:p>
+            <a:pPr>
+              <a:defRPr sz="1000" i="1">
+                <a:solidFill>
+                  <a:srgbClr val="94A3B8"/>
+                </a:solidFill>
+              </a:defRPr>
+            </a:pPr>
+            <a:r>
+              <a:t>Figure 3: Selection of INT-02 North Highway Corridor with 80 km/h speed threshold and dual-lane ANPR.</a:t>
+            </a:r>
+          </a:p>
+        </p:txBody>
+      </p:sp>
+      <p:sp>
+        <p:nvSpPr>
+          <p:cNvPr id="6" name="Rounded Rectangle 5"/>
+          <p:cNvSpPr/>
+          <p:nvPr/>
+        </p:nvSpPr>
+        <p:spPr>
+          <a:xfrm>
+            <a:off x="7132320" y="1645920"/>
+            <a:ext cx="4297680" cy="4389120"/>
+          </a:xfrm>
+          <a:prstGeom prst="roundRect">
+            <a:avLst/>
+          </a:prstGeom>
+          <a:solidFill>
+            <a:srgbClr val="0F172A"/>
+          </a:solidFill>
+          <a:ln w="19050">
+            <a:solidFill>
+              <a:srgbClr val="38BDF8"/>
+            </a:solidFill>
+          </a:ln>
+        </p:spPr>
+        <p:style>
+          <a:lnRef idx="1">
+            <a:schemeClr val="accent1"/>
+          </a:lnRef>
+          <a:fillRef idx="3">
+            <a:schemeClr val="accent1"/>
+          </a:fillRef>
+          <a:effectRef idx="2">
+            <a:schemeClr val="accent1"/>
+          </a:effectRef>
+          <a:fontRef idx="minor">
+            <a:schemeClr val="lt1"/>
+          </a:fontRef>
+        </p:style>
+        <p:txBody>
+          <a:bodyPr rtlCol="0" anchor="ctr"/>
+          <a:lstStyle/>
+          <a:p>
+            <a:pPr algn="ctr"/>
+          </a:p>
+        </p:txBody>
+      </p:sp>
+      <p:sp>
+        <p:nvSpPr>
+          <p:cNvPr id="7" name="TextBox 6"/>
+          <p:cNvSpPr txBox="1"/>
+          <p:nvPr/>
+        </p:nvSpPr>
+        <p:spPr>
+          <a:xfrm>
+            <a:off x="7315200" y="1828800"/>
+            <a:ext cx="3931920" cy="4023359"/>
+          </a:xfrm>
+          <a:prstGeom prst="rect">
+            <a:avLst/>
+          </a:prstGeom>
+          <a:noFill/>
+        </p:spPr>
+        <p:txBody>
+          <a:bodyPr wrap="square">
+            <a:spAutoFit/>
+          </a:bodyPr>
+          <a:lstStyle/>
+          <a:p>
+            <a:pPr>
+              <a:defRPr sz="1400" b="1">
+                <a:solidFill>
+                  <a:srgbClr val="38BDF8"/>
+                </a:solidFill>
+              </a:defRPr>
+            </a:pPr>
+            <a:r>
+              <a:t>Corridor Geofencing Profiles</a:t>
+            </a:r>
+          </a:p>
+          <a:p>
+            <a:pPr>
+              <a:spcAft>
+                <a:spcPts val="400"/>
+              </a:spcAft>
+              <a:defRPr sz="1100">
+                <a:solidFill>
+                  <a:srgbClr val="F8FAFC"/>
+                </a:solidFill>
+              </a:defRPr>
+            </a:pPr>
+            <a:r>
+              <a:t>• INT-01 Central Plaza: Urban commercial junction with 50 km/h limit and heavy pedestrian traffic.</a:t>
+            </a:r>
+          </a:p>
+          <a:p>
+            <a:pPr>
+              <a:spcAft>
+                <a:spcPts val="400"/>
+              </a:spcAft>
+              <a:defRPr sz="1100">
+                <a:solidFill>
+                  <a:srgbClr val="F8FAFC"/>
+                </a:solidFill>
+              </a:defRPr>
+            </a:pPr>
+            <a:r>
+              <a:t>• INT-02 North Highway: Arterial express corridor with 80 km/h limit and high-speed ANPR.</a:t>
+            </a:r>
+          </a:p>
+          <a:p>
+            <a:pPr>
+              <a:spcAft>
+                <a:spcPts val="400"/>
+              </a:spcAft>
+              <a:defRPr sz="1100">
+                <a:solidFill>
+                  <a:srgbClr val="F8FAFC"/>
+                </a:solidFill>
+              </a:defRPr>
+            </a:pPr>
+            <a:r>
+              <a:t>• INT-03 Ring Road Flyover: 60 km/h expressway merge ramp with radar-linked PTZ cameras.</a:t>
+            </a:r>
+          </a:p>
+          <a:p>
+            <a:pPr>
+              <a:spcAft>
+                <a:spcPts val="400"/>
+              </a:spcAft>
+              <a:defRPr sz="1100">
+                <a:solidFill>
+                  <a:srgbClr val="F8FAFC"/>
+                </a:solidFill>
+              </a:defRPr>
+            </a:pPr>
+            <a:r>
+              <a:t>• INT-04 Tech Park Junction: 50 km/h boulevard crossing with smart traffic signal integration.</a:t>
+            </a:r>
+          </a:p>
+          <a:p>
+            <a:pPr>
+              <a:spcAft>
+                <a:spcPts val="400"/>
+              </a:spcAft>
+              <a:defRPr sz="1100">
+                <a:solidFill>
+                  <a:srgbClr val="F8FAFC"/>
+                </a:solidFill>
+              </a:defRPr>
+            </a:pPr>
+            <a:r>
+              <a:t>• Speed thresholds and camera orientations reconfigure dynamically upon intersection selection.</a:t>
+            </a:r>
+          </a:p>
+        </p:txBody>
+      </p:sp>
+    </p:spTree>
+  </p:cSld>
+  <p:clrMapOvr>
+    <a:masterClrMapping/>
+  </p:clrMapOvr>
+</p:sld>
+</file>
+
+<file path=ppt/slides/slide11.xml><?xml version="1.0" encoding="utf-8"?>
+<p:sld xmlns:a="http://schemas.openxmlformats.org/drawingml/2006/main" xmlns:p="http://schemas.openxmlformats.org/presentationml/2006/main" xmlns:r="http://schemas.openxmlformats.org/officeDocument/2006/relationships">
+  <p:cSld>
+    <p:spTree>
+      <p:nvGrpSpPr>
+        <p:cNvPr id="1" name=""/>
+        <p:cNvGrpSpPr/>
+        <p:nvPr/>
+      </p:nvGrpSpPr>
+      <p:grpSpPr/>
+      <p:sp>
+        <p:nvSpPr>
+          <p:cNvPr id="2" name="Rectangle 1"/>
+          <p:cNvSpPr/>
+          <p:nvPr/>
+        </p:nvSpPr>
+        <p:spPr>
+          <a:xfrm>
+            <a:off x="0" y="0"/>
+            <a:ext cx="12191695" cy="6858000"/>
+          </a:xfrm>
+          <a:prstGeom prst="rect">
+            <a:avLst/>
+          </a:prstGeom>
+          <a:solidFill>
+            <a:srgbClr val="0A0E17"/>
+          </a:solidFill>
+          <a:ln>
+            <a:noFill/>
+          </a:ln>
+        </p:spPr>
+        <p:style>
+          <a:lnRef idx="1">
+            <a:schemeClr val="accent1"/>
+          </a:lnRef>
+          <a:fillRef idx="3">
+            <a:schemeClr val="accent1"/>
+          </a:fillRef>
+          <a:effectRef idx="2">
+            <a:schemeClr val="accent1"/>
+          </a:effectRef>
+          <a:fontRef idx="minor">
+            <a:schemeClr val="lt1"/>
+          </a:fontRef>
+        </p:style>
+        <p:txBody>
+          <a:bodyPr rtlCol="0" anchor="ctr"/>
+          <a:lstStyle/>
+          <a:p>
+            <a:pPr algn="ctr"/>
+          </a:p>
+        </p:txBody>
+      </p:sp>
+      <p:sp>
+        <p:nvSpPr>
+          <p:cNvPr id="3" name="TextBox 2"/>
+          <p:cNvSpPr txBox="1"/>
+          <p:nvPr/>
+        </p:nvSpPr>
+        <p:spPr>
+          <a:xfrm>
+            <a:off x="731520" y="365760"/>
+            <a:ext cx="10728655" cy="1005840"/>
+          </a:xfrm>
+          <a:prstGeom prst="rect">
+            <a:avLst/>
+          </a:prstGeom>
+          <a:noFill/>
+        </p:spPr>
+        <p:txBody>
+          <a:bodyPr wrap="square">
+            <a:spAutoFit/>
+          </a:bodyPr>
+          <a:lstStyle/>
+          <a:p>
+            <a:pPr>
+              <a:defRPr sz="1100" b="1">
+                <a:solidFill>
+                  <a:srgbClr val="38BDF8"/>
+                </a:solidFill>
+              </a:defRPr>
+            </a:pPr>
+            <a:r>
+              <a:t>INTELLIGENT TRANSPORTATION SYSTEMS • PROJECT-037</a:t>
+            </a:r>
+          </a:p>
+          <a:p>
+            <a:pPr>
+              <a:defRPr sz="2200" b="1">
+                <a:solidFill>
+                  <a:srgbClr val="F8FAFC"/>
+                </a:solidFill>
+              </a:defRPr>
+            </a:pPr>
+            <a:r>
+              <a:t>Real-Time Speeding Violation &amp; Radar Bounding Boxes</a:t>
+            </a:r>
+          </a:p>
+        </p:txBody>
+      </p:sp>
+      <p:pic>
+        <p:nvPicPr>
+          <p:cNvPr id="4" name="Picture 3" descr="04_speeding_violation_telemetry.png"/>
+          <p:cNvPicPr>
+            <a:picLocks noChangeAspect="1"/>
+          </p:cNvPicPr>
+          <p:nvPr/>
+        </p:nvPicPr>
+        <p:blipFill>
+          <a:blip r:embed="rId2"/>
+          <a:stretch>
+            <a:fillRect/>
+          </a:stretch>
+        </p:blipFill>
+        <p:spPr>
+          <a:xfrm>
+            <a:off x="731520" y="1645920"/>
+            <a:ext cx="6217920" cy="4389120"/>
+          </a:xfrm>
+          <a:prstGeom prst="rect">
+            <a:avLst/>
+          </a:prstGeom>
+        </p:spPr>
+      </p:pic>
+      <p:sp>
+        <p:nvSpPr>
+          <p:cNvPr id="5" name="TextBox 4"/>
+          <p:cNvSpPr txBox="1"/>
+          <p:nvPr/>
+        </p:nvSpPr>
+        <p:spPr>
+          <a:xfrm>
+            <a:off x="731520" y="6080759"/>
+            <a:ext cx="6217920" cy="365760"/>
+          </a:xfrm>
+          <a:prstGeom prst="rect">
+            <a:avLst/>
+          </a:prstGeom>
+          <a:noFill/>
+        </p:spPr>
+        <p:txBody>
+          <a:bodyPr wrap="none">
+            <a:spAutoFit/>
+          </a:bodyPr>
+          <a:lstStyle/>
+          <a:p>
+            <a:pPr>
+              <a:defRPr sz="1000" i="1">
+                <a:solidFill>
+                  <a:srgbClr val="94A3B8"/>
+                </a:solidFill>
+              </a:defRPr>
+            </a:pPr>
+            <a:r>
+              <a:t>Figure 4: Injected high-velocity speeding violation (98 km/h) flagged with red bounding box and MVA fine.</a:t>
+            </a:r>
+          </a:p>
+        </p:txBody>
+      </p:sp>
+      <p:sp>
+        <p:nvSpPr>
+          <p:cNvPr id="6" name="Rounded Rectangle 5"/>
+          <p:cNvSpPr/>
+          <p:nvPr/>
+        </p:nvSpPr>
+        <p:spPr>
+          <a:xfrm>
+            <a:off x="7132320" y="1645920"/>
+            <a:ext cx="4297680" cy="4389120"/>
+          </a:xfrm>
+          <a:prstGeom prst="roundRect">
+            <a:avLst/>
+          </a:prstGeom>
+          <a:solidFill>
+            <a:srgbClr val="0F172A"/>
+          </a:solidFill>
+          <a:ln w="19050">
+            <a:solidFill>
+              <a:srgbClr val="EF4444"/>
+            </a:solidFill>
+          </a:ln>
+        </p:spPr>
+        <p:style>
+          <a:lnRef idx="1">
+            <a:schemeClr val="accent1"/>
+          </a:lnRef>
+          <a:fillRef idx="3">
+            <a:schemeClr val="accent1"/>
+          </a:fillRef>
+          <a:effectRef idx="2">
+            <a:schemeClr val="accent1"/>
+          </a:effectRef>
+          <a:fontRef idx="minor">
+            <a:schemeClr val="lt1"/>
+          </a:fontRef>
+        </p:style>
+        <p:txBody>
+          <a:bodyPr rtlCol="0" anchor="ctr"/>
+          <a:lstStyle/>
+          <a:p>
+            <a:pPr algn="ctr"/>
+          </a:p>
+        </p:txBody>
+      </p:sp>
+      <p:sp>
+        <p:nvSpPr>
+          <p:cNvPr id="7" name="TextBox 6"/>
+          <p:cNvSpPr txBox="1"/>
+          <p:nvPr/>
+        </p:nvSpPr>
+        <p:spPr>
+          <a:xfrm>
+            <a:off x="7315200" y="1828800"/>
+            <a:ext cx="3931920" cy="4023359"/>
+          </a:xfrm>
+          <a:prstGeom prst="rect">
+            <a:avLst/>
+          </a:prstGeom>
+          <a:noFill/>
+        </p:spPr>
+        <p:txBody>
+          <a:bodyPr wrap="square">
+            <a:spAutoFit/>
+          </a:bodyPr>
+          <a:lstStyle/>
+          <a:p>
+            <a:pPr>
+              <a:defRPr sz="1400" b="1">
+                <a:solidFill>
+                  <a:srgbClr val="38BDF8"/>
+                </a:solidFill>
+              </a:defRPr>
+            </a:pPr>
+            <a:r>
+              <a:t>Speeding Enforcement Details</a:t>
+            </a:r>
+          </a:p>
+          <a:p>
+            <a:pPr>
+              <a:spcAft>
+                <a:spcPts val="400"/>
+              </a:spcAft>
+              <a:defRPr sz="1100">
+                <a:solidFill>
+                  <a:srgbClr val="F8FAFC"/>
+                </a:solidFill>
+              </a:defRPr>
+            </a:pPr>
+            <a:r>
+              <a:t>• Neural network detects +38 km/h excess velocity relative to posted 60 km/h speed limit.</a:t>
+            </a:r>
+          </a:p>
+          <a:p>
+            <a:pPr>
+              <a:spcAft>
+                <a:spcPts val="400"/>
+              </a:spcAft>
+              <a:defRPr sz="1100">
+                <a:solidFill>
+                  <a:srgbClr val="F8FAFC"/>
+                </a:solidFill>
+              </a:defRPr>
+            </a:pPr>
+            <a:r>
+              <a:t>• Classifier achieves 100% confidence for Speeding classification with zero ambiguity.</a:t>
+            </a:r>
+          </a:p>
+          <a:p>
+            <a:pPr>
+              <a:spcAft>
+                <a:spcPts val="400"/>
+              </a:spcAft>
+              <a:defRPr sz="1100">
+                <a:solidFill>
+                  <a:srgbClr val="F8FAFC"/>
+                </a:solidFill>
+              </a:defRPr>
+            </a:pPr>
+            <a:r>
+              <a:t>• Severity Index calculated at 73.2/100, reflecting elevated kinetic energy in impact scenarios.</a:t>
+            </a:r>
+          </a:p>
+          <a:p>
+            <a:pPr>
+              <a:spcAft>
+                <a:spcPts val="400"/>
+              </a:spcAft>
+              <a:defRPr sz="1100">
+                <a:solidFill>
+                  <a:srgbClr val="F8FAFC"/>
+                </a:solidFill>
+              </a:defRPr>
+            </a:pPr>
+            <a:r>
+              <a:t>• Collision risk evaluated at 0.7402, automatically triggering emergency alert notifications.</a:t>
+            </a:r>
+          </a:p>
+          <a:p>
+            <a:pPr>
+              <a:spcAft>
+                <a:spcPts val="400"/>
+              </a:spcAft>
+              <a:defRPr sz="1100">
+                <a:solidFill>
+                  <a:srgbClr val="F8FAFC"/>
+                </a:solidFill>
+              </a:defRPr>
+            </a:pPr>
+            <a:r>
+              <a:t>• Statutory penalty mapped to MVA Sec 183(1) with automatic ₹2,000 fine generation.</a:t>
+            </a:r>
+          </a:p>
+        </p:txBody>
+      </p:sp>
+    </p:spTree>
+  </p:cSld>
+  <p:clrMapOvr>
+    <a:masterClrMapping/>
+  </p:clrMapOvr>
+</p:sld>
+</file>
+
+<file path=ppt/slides/slide12.xml><?xml version="1.0" encoding="utf-8"?>
+<p:sld xmlns:a="http://schemas.openxmlformats.org/drawingml/2006/main" xmlns:p="http://schemas.openxmlformats.org/presentationml/2006/main" xmlns:r="http://schemas.openxmlformats.org/officeDocument/2006/relationships">
+  <p:cSld>
+    <p:spTree>
+      <p:nvGrpSpPr>
+        <p:cNvPr id="1" name=""/>
+        <p:cNvGrpSpPr/>
+        <p:nvPr/>
+      </p:nvGrpSpPr>
+      <p:grpSpPr/>
+      <p:sp>
+        <p:nvSpPr>
+          <p:cNvPr id="2" name="Rectangle 1"/>
+          <p:cNvSpPr/>
+          <p:nvPr/>
+        </p:nvSpPr>
+        <p:spPr>
+          <a:xfrm>
+            <a:off x="0" y="0"/>
+            <a:ext cx="12191695" cy="6858000"/>
+          </a:xfrm>
+          <a:prstGeom prst="rect">
+            <a:avLst/>
+          </a:prstGeom>
+          <a:solidFill>
+            <a:srgbClr val="0A0E17"/>
+          </a:solidFill>
+          <a:ln>
+            <a:noFill/>
+          </a:ln>
+        </p:spPr>
+        <p:style>
+          <a:lnRef idx="1">
+            <a:schemeClr val="accent1"/>
+          </a:lnRef>
+          <a:fillRef idx="3">
+            <a:schemeClr val="accent1"/>
+          </a:fillRef>
+          <a:effectRef idx="2">
+            <a:schemeClr val="accent1"/>
+          </a:effectRef>
+          <a:fontRef idx="minor">
+            <a:schemeClr val="lt1"/>
+          </a:fontRef>
+        </p:style>
+        <p:txBody>
+          <a:bodyPr rtlCol="0" anchor="ctr"/>
+          <a:lstStyle/>
+          <a:p>
+            <a:pPr algn="ctr"/>
+          </a:p>
+        </p:txBody>
+      </p:sp>
+      <p:sp>
+        <p:nvSpPr>
+          <p:cNvPr id="3" name="TextBox 2"/>
+          <p:cNvSpPr txBox="1"/>
+          <p:nvPr/>
+        </p:nvSpPr>
+        <p:spPr>
+          <a:xfrm>
+            <a:off x="731520" y="365760"/>
+            <a:ext cx="10728655" cy="1005840"/>
+          </a:xfrm>
+          <a:prstGeom prst="rect">
+            <a:avLst/>
+          </a:prstGeom>
+          <a:noFill/>
+        </p:spPr>
+        <p:txBody>
+          <a:bodyPr wrap="square">
+            <a:spAutoFit/>
+          </a:bodyPr>
+          <a:lstStyle/>
+          <a:p>
+            <a:pPr>
+              <a:defRPr sz="1100" b="1">
+                <a:solidFill>
+                  <a:srgbClr val="38BDF8"/>
+                </a:solidFill>
+              </a:defRPr>
+            </a:pPr>
+            <a:r>
+              <a:t>INTELLIGENT TRANSPORTATION SYSTEMS • PROJECT-037</a:t>
+            </a:r>
+          </a:p>
+          <a:p>
+            <a:pPr>
+              <a:defRPr sz="2200" b="1">
+                <a:solidFill>
+                  <a:srgbClr val="F8FAFC"/>
+                </a:solidFill>
+              </a:defRPr>
+            </a:pPr>
+            <a:r>
+              <a:t>Red Light Signal Jump &amp; Stop Line Intrusion Detection</a:t>
+            </a:r>
+          </a:p>
+        </p:txBody>
+      </p:sp>
+      <p:pic>
+        <p:nvPicPr>
+          <p:cNvPr id="4" name="Picture 3" descr="05_red_light_signal_jump.png"/>
+          <p:cNvPicPr>
+            <a:picLocks noChangeAspect="1"/>
+          </p:cNvPicPr>
+          <p:nvPr/>
+        </p:nvPicPr>
+        <p:blipFill>
+          <a:blip r:embed="rId2"/>
+          <a:stretch>
+            <a:fillRect/>
+          </a:stretch>
+        </p:blipFill>
+        <p:spPr>
+          <a:xfrm>
+            <a:off x="731520" y="1645920"/>
+            <a:ext cx="6217920" cy="4389120"/>
+          </a:xfrm>
+          <a:prstGeom prst="rect">
+            <a:avLst/>
+          </a:prstGeom>
+        </p:spPr>
+      </p:pic>
+      <p:sp>
+        <p:nvSpPr>
+          <p:cNvPr id="5" name="TextBox 4"/>
+          <p:cNvSpPr txBox="1"/>
+          <p:nvPr/>
+        </p:nvSpPr>
+        <p:spPr>
+          <a:xfrm>
+            <a:off x="731520" y="6080759"/>
+            <a:ext cx="6217920" cy="365760"/>
+          </a:xfrm>
+          <a:prstGeom prst="rect">
+            <a:avLst/>
+          </a:prstGeom>
+          <a:noFill/>
+        </p:spPr>
+        <p:txBody>
+          <a:bodyPr wrap="none">
+            <a:spAutoFit/>
+          </a:bodyPr>
+          <a:lstStyle/>
+          <a:p>
+            <a:pPr>
+              <a:defRPr sz="1000" i="1">
+                <a:solidFill>
+                  <a:srgbClr val="94A3B8"/>
+                </a:solidFill>
+              </a:defRPr>
+            </a:pPr>
+            <a:r>
+              <a:t>Figure 5: Red light violation with vehicle past stop line (-3.5m) flagged with MVA Sec 184 fine.</a:t>
+            </a:r>
+          </a:p>
+        </p:txBody>
+      </p:sp>
+      <p:sp>
+        <p:nvSpPr>
+          <p:cNvPr id="6" name="Rounded Rectangle 5"/>
+          <p:cNvSpPr/>
+          <p:nvPr/>
+        </p:nvSpPr>
+        <p:spPr>
+          <a:xfrm>
+            <a:off x="7132320" y="1645920"/>
+            <a:ext cx="4297680" cy="4389120"/>
+          </a:xfrm>
+          <a:prstGeom prst="roundRect">
+            <a:avLst/>
+          </a:prstGeom>
+          <a:solidFill>
+            <a:srgbClr val="0F172A"/>
+          </a:solidFill>
+          <a:ln w="19050">
+            <a:solidFill>
+              <a:srgbClr val="EF4444"/>
+            </a:solidFill>
+          </a:ln>
+        </p:spPr>
+        <p:style>
+          <a:lnRef idx="1">
+            <a:schemeClr val="accent1"/>
+          </a:lnRef>
+          <a:fillRef idx="3">
+            <a:schemeClr val="accent1"/>
+          </a:fillRef>
+          <a:effectRef idx="2">
+            <a:schemeClr val="accent1"/>
+          </a:effectRef>
+          <a:fontRef idx="minor">
+            <a:schemeClr val="lt1"/>
+          </a:fontRef>
+        </p:style>
+        <p:txBody>
+          <a:bodyPr rtlCol="0" anchor="ctr"/>
+          <a:lstStyle/>
+          <a:p>
+            <a:pPr algn="ctr"/>
+          </a:p>
+        </p:txBody>
+      </p:sp>
+      <p:sp>
+        <p:nvSpPr>
+          <p:cNvPr id="7" name="TextBox 6"/>
+          <p:cNvSpPr txBox="1"/>
+          <p:nvPr/>
+        </p:nvSpPr>
+        <p:spPr>
+          <a:xfrm>
+            <a:off x="7315200" y="1828800"/>
+            <a:ext cx="3931920" cy="4023359"/>
+          </a:xfrm>
+          <a:prstGeom prst="rect">
+            <a:avLst/>
+          </a:prstGeom>
+          <a:noFill/>
+        </p:spPr>
+        <p:txBody>
+          <a:bodyPr wrap="square">
+            <a:spAutoFit/>
+          </a:bodyPr>
+          <a:lstStyle/>
+          <a:p>
+            <a:pPr>
+              <a:defRPr sz="1400" b="1">
+                <a:solidFill>
+                  <a:srgbClr val="38BDF8"/>
+                </a:solidFill>
+              </a:defRPr>
+            </a:pPr>
+            <a:r>
+              <a:t>Signal Phase Integration</a:t>
+            </a:r>
+          </a:p>
+          <a:p>
+            <a:pPr>
+              <a:spcAft>
+                <a:spcPts val="400"/>
+              </a:spcAft>
+              <a:defRPr sz="1100">
+                <a:solidFill>
+                  <a:srgbClr val="F8FAFC"/>
+                </a:solidFill>
+              </a:defRPr>
+            </a:pPr>
+            <a:r>
+              <a:t>• Correlates traffic light state (Red = 0) with distance to stop line (-3.5m past line).</a:t>
+            </a:r>
+          </a:p>
+          <a:p>
+            <a:pPr>
+              <a:spcAft>
+                <a:spcPts val="400"/>
+              </a:spcAft>
+              <a:defRPr sz="1100">
+                <a:solidFill>
+                  <a:srgbClr val="F8FAFC"/>
+                </a:solidFill>
+              </a:defRPr>
+            </a:pPr>
+            <a:r>
+              <a:t>• Classifier instantly flags 'Red Light Violation' with high confidence.</a:t>
+            </a:r>
+          </a:p>
+          <a:p>
+            <a:pPr>
+              <a:spcAft>
+                <a:spcPts val="400"/>
+              </a:spcAft>
+              <a:defRPr sz="1100">
+                <a:solidFill>
+                  <a:srgbClr val="F8FAFC"/>
+                </a:solidFill>
+              </a:defRPr>
+            </a:pPr>
+            <a:r>
+              <a:t>• Predicts critical intersection cross-traffic collision risk exceeding 0.75.</a:t>
+            </a:r>
+          </a:p>
+          <a:p>
+            <a:pPr>
+              <a:spcAft>
+                <a:spcPts val="400"/>
+              </a:spcAft>
+              <a:defRPr sz="1100">
+                <a:solidFill>
+                  <a:srgbClr val="F8FAFC"/>
+                </a:solidFill>
+              </a:defRPr>
+            </a:pPr>
+            <a:r>
+              <a:t>• Statutory fine mapped to MVA Sec 184 (Dangerous Driving &amp; Signal Jump) for ₹1,000.</a:t>
+            </a:r>
+          </a:p>
+          <a:p>
+            <a:pPr>
+              <a:spcAft>
+                <a:spcPts val="400"/>
+              </a:spcAft>
+              <a:defRPr sz="1100">
+                <a:solidFill>
+                  <a:srgbClr val="F8FAFC"/>
+                </a:solidFill>
+              </a:defRPr>
+            </a:pPr>
+            <a:r>
+              <a:t>• Stores high-resolution photographic evidence and radar speed telemetry for prosecution.</a:t>
+            </a:r>
+          </a:p>
+        </p:txBody>
+      </p:sp>
+    </p:spTree>
+  </p:cSld>
+  <p:clrMapOvr>
+    <a:masterClrMapping/>
+  </p:clrMapOvr>
+</p:sld>
+</file>
+
+<file path=ppt/slides/slide13.xml><?xml version="1.0" encoding="utf-8"?>
+<p:sld xmlns:a="http://schemas.openxmlformats.org/drawingml/2006/main" xmlns:p="http://schemas.openxmlformats.org/presentationml/2006/main" xmlns:r="http://schemas.openxmlformats.org/officeDocument/2006/relationships">
+  <p:cSld>
+    <p:spTree>
+      <p:nvGrpSpPr>
+        <p:cNvPr id="1" name=""/>
+        <p:cNvGrpSpPr/>
+        <p:nvPr/>
+      </p:nvGrpSpPr>
+      <p:grpSpPr/>
+      <p:sp>
+        <p:nvSpPr>
+          <p:cNvPr id="2" name="Rectangle 1"/>
+          <p:cNvSpPr/>
+          <p:nvPr/>
+        </p:nvSpPr>
+        <p:spPr>
+          <a:xfrm>
+            <a:off x="0" y="0"/>
+            <a:ext cx="12191695" cy="6858000"/>
+          </a:xfrm>
+          <a:prstGeom prst="rect">
+            <a:avLst/>
+          </a:prstGeom>
+          <a:solidFill>
+            <a:srgbClr val="0A0E17"/>
+          </a:solidFill>
+          <a:ln>
+            <a:noFill/>
+          </a:ln>
+        </p:spPr>
+        <p:style>
+          <a:lnRef idx="1">
+            <a:schemeClr val="accent1"/>
+          </a:lnRef>
+          <a:fillRef idx="3">
+            <a:schemeClr val="accent1"/>
+          </a:fillRef>
+          <a:effectRef idx="2">
+            <a:schemeClr val="accent1"/>
+          </a:effectRef>
+          <a:fontRef idx="minor">
+            <a:schemeClr val="lt1"/>
+          </a:fontRef>
+        </p:style>
+        <p:txBody>
+          <a:bodyPr rtlCol="0" anchor="ctr"/>
+          <a:lstStyle/>
+          <a:p>
+            <a:pPr algn="ctr"/>
+          </a:p>
+        </p:txBody>
+      </p:sp>
+      <p:sp>
+        <p:nvSpPr>
+          <p:cNvPr id="3" name="TextBox 2"/>
+          <p:cNvSpPr txBox="1"/>
+          <p:nvPr/>
+        </p:nvSpPr>
+        <p:spPr>
+          <a:xfrm>
+            <a:off x="731520" y="365760"/>
+            <a:ext cx="10728655" cy="1005840"/>
+          </a:xfrm>
+          <a:prstGeom prst="rect">
+            <a:avLst/>
+          </a:prstGeom>
+          <a:noFill/>
+        </p:spPr>
+        <p:txBody>
+          <a:bodyPr wrap="square">
+            <a:spAutoFit/>
+          </a:bodyPr>
+          <a:lstStyle/>
+          <a:p>
+            <a:pPr>
+              <a:defRPr sz="1100" b="1">
+                <a:solidFill>
+                  <a:srgbClr val="38BDF8"/>
+                </a:solidFill>
+              </a:defRPr>
+            </a:pPr>
+            <a:r>
+              <a:t>INTELLIGENT TRANSPORTATION SYSTEMS • PROJECT-037</a:t>
+            </a:r>
+          </a:p>
+          <a:p>
+            <a:pPr>
+              <a:defRPr sz="2200" b="1">
+                <a:solidFill>
+                  <a:srgbClr val="F8FAFC"/>
+                </a:solidFill>
+              </a:defRPr>
+            </a:pPr>
+            <a:r>
+              <a:t>Vulnerable Road User Safety &amp; Helmet Enforcement</a:t>
+            </a:r>
+          </a:p>
+        </p:txBody>
+      </p:sp>
+      <p:pic>
+        <p:nvPicPr>
+          <p:cNvPr id="4" name="Picture 3" descr="06_two_wheeler_no_helmet.png"/>
+          <p:cNvPicPr>
+            <a:picLocks noChangeAspect="1"/>
+          </p:cNvPicPr>
+          <p:nvPr/>
+        </p:nvPicPr>
+        <p:blipFill>
+          <a:blip r:embed="rId2"/>
+          <a:stretch>
+            <a:fillRect/>
+          </a:stretch>
+        </p:blipFill>
+        <p:spPr>
+          <a:xfrm>
+            <a:off x="731520" y="1645920"/>
+            <a:ext cx="6217920" cy="4389120"/>
+          </a:xfrm>
+          <a:prstGeom prst="rect">
+            <a:avLst/>
+          </a:prstGeom>
+        </p:spPr>
+      </p:pic>
+      <p:sp>
+        <p:nvSpPr>
+          <p:cNvPr id="5" name="TextBox 4"/>
+          <p:cNvSpPr txBox="1"/>
+          <p:nvPr/>
+        </p:nvSpPr>
+        <p:spPr>
+          <a:xfrm>
+            <a:off x="731520" y="6080759"/>
+            <a:ext cx="6217920" cy="365760"/>
+          </a:xfrm>
+          <a:prstGeom prst="rect">
+            <a:avLst/>
+          </a:prstGeom>
+          <a:noFill/>
+        </p:spPr>
+        <p:txBody>
+          <a:bodyPr wrap="none">
+            <a:spAutoFit/>
+          </a:bodyPr>
+          <a:lstStyle/>
+          <a:p>
+            <a:pPr>
+              <a:defRPr sz="1000" i="1">
+                <a:solidFill>
+                  <a:srgbClr val="94A3B8"/>
+                </a:solidFill>
+              </a:defRPr>
+            </a:pPr>
+            <a:r>
+              <a:t>Figure 6: Two-wheeler motorcycle rider without protective headgear detected and penalized under MVA Sec 194D.</a:t>
+            </a:r>
+          </a:p>
+        </p:txBody>
+      </p:sp>
+      <p:sp>
+        <p:nvSpPr>
+          <p:cNvPr id="6" name="Rounded Rectangle 5"/>
+          <p:cNvSpPr/>
+          <p:nvPr/>
+        </p:nvSpPr>
+        <p:spPr>
+          <a:xfrm>
+            <a:off x="7132320" y="1645920"/>
+            <a:ext cx="4297680" cy="4389120"/>
+          </a:xfrm>
+          <a:prstGeom prst="roundRect">
+            <a:avLst/>
+          </a:prstGeom>
+          <a:solidFill>
+            <a:srgbClr val="0F172A"/>
+          </a:solidFill>
+          <a:ln w="19050">
+            <a:solidFill>
+              <a:srgbClr val="F59E0B"/>
+            </a:solidFill>
+          </a:ln>
+        </p:spPr>
+        <p:style>
+          <a:lnRef idx="1">
+            <a:schemeClr val="accent1"/>
+          </a:lnRef>
+          <a:fillRef idx="3">
+            <a:schemeClr val="accent1"/>
+          </a:fillRef>
+          <a:effectRef idx="2">
+            <a:schemeClr val="accent1"/>
+          </a:effectRef>
+          <a:fontRef idx="minor">
+            <a:schemeClr val="lt1"/>
+          </a:fontRef>
+        </p:style>
+        <p:txBody>
+          <a:bodyPr rtlCol="0" anchor="ctr"/>
+          <a:lstStyle/>
+          <a:p>
+            <a:pPr algn="ctr"/>
+          </a:p>
+        </p:txBody>
+      </p:sp>
+      <p:sp>
+        <p:nvSpPr>
+          <p:cNvPr id="7" name="TextBox 6"/>
+          <p:cNvSpPr txBox="1"/>
+          <p:nvPr/>
+        </p:nvSpPr>
+        <p:spPr>
+          <a:xfrm>
+            <a:off x="7315200" y="1828800"/>
+            <a:ext cx="3931920" cy="4023359"/>
+          </a:xfrm>
+          <a:prstGeom prst="rect">
+            <a:avLst/>
+          </a:prstGeom>
+          <a:noFill/>
+        </p:spPr>
+        <p:txBody>
+          <a:bodyPr wrap="square">
+            <a:spAutoFit/>
+          </a:bodyPr>
+          <a:lstStyle/>
+          <a:p>
+            <a:pPr>
+              <a:defRPr sz="1400" b="1">
+                <a:solidFill>
+                  <a:srgbClr val="38BDF8"/>
+                </a:solidFill>
+              </a:defRPr>
+            </a:pPr>
+            <a:r>
+              <a:t>Two-Wheeler Safety AI</a:t>
+            </a:r>
+          </a:p>
+          <a:p>
+            <a:pPr>
+              <a:spcAft>
+                <a:spcPts val="400"/>
+              </a:spcAft>
+              <a:defRPr sz="1100">
+                <a:solidFill>
+                  <a:srgbClr val="F8FAFC"/>
+                </a:solidFill>
+              </a:defRPr>
+            </a:pPr>
+            <a:r>
+              <a:t>• Automated vehicle classification distinguishes motorcycles from four-wheel vehicles.</a:t>
+            </a:r>
+          </a:p>
+          <a:p>
+            <a:pPr>
+              <a:spcAft>
+                <a:spcPts val="400"/>
+              </a:spcAft>
+              <a:defRPr sz="1100">
+                <a:solidFill>
+                  <a:srgbClr val="F8FAFC"/>
+                </a:solidFill>
+              </a:defRPr>
+            </a:pPr>
+            <a:r>
+              <a:t>• Evaluates binary helmet presence indicator from head bounding box region.</a:t>
+            </a:r>
+          </a:p>
+          <a:p>
+            <a:pPr>
+              <a:spcAft>
+                <a:spcPts val="400"/>
+              </a:spcAft>
+              <a:defRPr sz="1100">
+                <a:solidFill>
+                  <a:srgbClr val="F8FAFC"/>
+                </a:solidFill>
+              </a:defRPr>
+            </a:pPr>
+            <a:r>
+              <a:t>• Flags 'No Helmet / Two-Wheeler' violation with immediate ₹1,000 statutory fine.</a:t>
+            </a:r>
+          </a:p>
+          <a:p>
+            <a:pPr>
+              <a:spcAft>
+                <a:spcPts val="400"/>
+              </a:spcAft>
+              <a:defRPr sz="1100">
+                <a:solidFill>
+                  <a:srgbClr val="F8FAFC"/>
+                </a:solidFill>
+              </a:defRPr>
+            </a:pPr>
+            <a:r>
+              <a:t>• Enforces MVA Sec 194D (Riding Without Protective Headgear).</a:t>
+            </a:r>
+          </a:p>
+          <a:p>
+            <a:pPr>
+              <a:spcAft>
+                <a:spcPts val="400"/>
+              </a:spcAft>
+              <a:defRPr sz="1100">
+                <a:solidFill>
+                  <a:srgbClr val="F8FAFC"/>
+                </a:solidFill>
+              </a:defRPr>
+            </a:pPr>
+            <a:r>
+              <a:t>• Reduces manual traffic police risk by autonomously intercepting non-compliant riders.</a:t>
+            </a:r>
+          </a:p>
+        </p:txBody>
+      </p:sp>
+    </p:spTree>
+  </p:cSld>
+  <p:clrMapOvr>
+    <a:masterClrMapping/>
+  </p:clrMapOvr>
+</p:sld>
+</file>
+
+<file path=ppt/slides/slide14.xml><?xml version="1.0" encoding="utf-8"?>
+<p:sld xmlns:a="http://schemas.openxmlformats.org/drawingml/2006/main" xmlns:p="http://schemas.openxmlformats.org/presentationml/2006/main" xmlns:r="http://schemas.openxmlformats.org/officeDocument/2006/relationships">
+  <p:cSld>
+    <p:spTree>
+      <p:nvGrpSpPr>
+        <p:cNvPr id="1" name=""/>
+        <p:cNvGrpSpPr/>
+        <p:nvPr/>
+      </p:nvGrpSpPr>
+      <p:grpSpPr/>
+      <p:sp>
+        <p:nvSpPr>
+          <p:cNvPr id="2" name="Rectangle 1"/>
+          <p:cNvSpPr/>
+          <p:nvPr/>
+        </p:nvSpPr>
+        <p:spPr>
+          <a:xfrm>
+            <a:off x="0" y="0"/>
+            <a:ext cx="12191695" cy="6858000"/>
+          </a:xfrm>
+          <a:prstGeom prst="rect">
+            <a:avLst/>
+          </a:prstGeom>
+          <a:solidFill>
+            <a:srgbClr val="0A0E17"/>
+          </a:solidFill>
+          <a:ln>
+            <a:noFill/>
+          </a:ln>
+        </p:spPr>
+        <p:style>
+          <a:lnRef idx="1">
+            <a:schemeClr val="accent1"/>
+          </a:lnRef>
+          <a:fillRef idx="3">
+            <a:schemeClr val="accent1"/>
+          </a:fillRef>
+          <a:effectRef idx="2">
+            <a:schemeClr val="accent1"/>
+          </a:effectRef>
+          <a:fontRef idx="minor">
+            <a:schemeClr val="lt1"/>
+          </a:fontRef>
+        </p:style>
+        <p:txBody>
+          <a:bodyPr rtlCol="0" anchor="ctr"/>
+          <a:lstStyle/>
+          <a:p>
+            <a:pPr algn="ctr"/>
+          </a:p>
+        </p:txBody>
+      </p:sp>
+      <p:sp>
+        <p:nvSpPr>
+          <p:cNvPr id="3" name="TextBox 2"/>
+          <p:cNvSpPr txBox="1"/>
+          <p:nvPr/>
+        </p:nvSpPr>
+        <p:spPr>
+          <a:xfrm>
+            <a:off x="731520" y="365760"/>
+            <a:ext cx="10728655" cy="1005840"/>
+          </a:xfrm>
+          <a:prstGeom prst="rect">
+            <a:avLst/>
+          </a:prstGeom>
+          <a:noFill/>
+        </p:spPr>
+        <p:txBody>
+          <a:bodyPr wrap="square">
+            <a:spAutoFit/>
+          </a:bodyPr>
+          <a:lstStyle/>
+          <a:p>
+            <a:pPr>
+              <a:defRPr sz="1100" b="1">
+                <a:solidFill>
+                  <a:srgbClr val="38BDF8"/>
+                </a:solidFill>
+              </a:defRPr>
+            </a:pPr>
+            <a:r>
+              <a:t>INTELLIGENT TRANSPORTATION SYSTEMS • PROJECT-037</a:t>
+            </a:r>
+          </a:p>
+          <a:p>
+            <a:pPr>
+              <a:defRPr sz="2200" b="1">
+                <a:solidFill>
+                  <a:srgbClr val="F8FAFC"/>
+                </a:solidFill>
+              </a:defRPr>
+            </a:pPr>
+            <a:r>
+              <a:t>Automated Statutory MVA e-Challan Penalties</a:t>
+            </a:r>
+          </a:p>
+        </p:txBody>
+      </p:sp>
+      <p:pic>
+        <p:nvPicPr>
+          <p:cNvPr id="4" name="Picture 3" descr="07_automated_echallan_feed.png"/>
+          <p:cNvPicPr>
+            <a:picLocks noChangeAspect="1"/>
+          </p:cNvPicPr>
+          <p:nvPr/>
+        </p:nvPicPr>
+        <p:blipFill>
+          <a:blip r:embed="rId2"/>
+          <a:stretch>
+            <a:fillRect/>
+          </a:stretch>
+        </p:blipFill>
+        <p:spPr>
+          <a:xfrm>
+            <a:off x="731520" y="1645920"/>
+            <a:ext cx="6217920" cy="4389120"/>
+          </a:xfrm>
+          <a:prstGeom prst="rect">
+            <a:avLst/>
+          </a:prstGeom>
+        </p:spPr>
+      </p:pic>
+      <p:sp>
+        <p:nvSpPr>
+          <p:cNvPr id="5" name="TextBox 4"/>
+          <p:cNvSpPr txBox="1"/>
+          <p:nvPr/>
+        </p:nvSpPr>
+        <p:spPr>
+          <a:xfrm>
+            <a:off x="731520" y="6080759"/>
+            <a:ext cx="6217920" cy="365760"/>
+          </a:xfrm>
+          <a:prstGeom prst="rect">
+            <a:avLst/>
+          </a:prstGeom>
+          <a:noFill/>
+        </p:spPr>
+        <p:txBody>
+          <a:bodyPr wrap="none">
+            <a:spAutoFit/>
+          </a:bodyPr>
+          <a:lstStyle/>
+          <a:p>
+            <a:pPr>
+              <a:defRPr sz="1000" i="1">
+                <a:solidFill>
+                  <a:srgbClr val="94A3B8"/>
+                </a:solidFill>
+              </a:defRPr>
+            </a:pPr>
+            <a:r>
+              <a:t>Figure 7: Live e-Challan feed displaying issued tickets, license plates, legal sections, and fine amounts.</a:t>
+            </a:r>
+          </a:p>
+        </p:txBody>
+      </p:sp>
+      <p:sp>
+        <p:nvSpPr>
+          <p:cNvPr id="6" name="Rounded Rectangle 5"/>
+          <p:cNvSpPr/>
+          <p:nvPr/>
+        </p:nvSpPr>
+        <p:spPr>
+          <a:xfrm>
+            <a:off x="7132320" y="1645920"/>
+            <a:ext cx="4297680" cy="4389120"/>
+          </a:xfrm>
+          <a:prstGeom prst="roundRect">
+            <a:avLst/>
+          </a:prstGeom>
+          <a:solidFill>
+            <a:srgbClr val="0F172A"/>
+          </a:solidFill>
+          <a:ln w="19050">
+            <a:solidFill>
+              <a:srgbClr val="10B981"/>
+            </a:solidFill>
+          </a:ln>
+        </p:spPr>
+        <p:style>
+          <a:lnRef idx="1">
+            <a:schemeClr val="accent1"/>
+          </a:lnRef>
+          <a:fillRef idx="3">
+            <a:schemeClr val="accent1"/>
+          </a:fillRef>
+          <a:effectRef idx="2">
+            <a:schemeClr val="accent1"/>
+          </a:effectRef>
+          <a:fontRef idx="minor">
+            <a:schemeClr val="lt1"/>
+          </a:fontRef>
+        </p:style>
+        <p:txBody>
+          <a:bodyPr rtlCol="0" anchor="ctr"/>
+          <a:lstStyle/>
+          <a:p>
+            <a:pPr algn="ctr"/>
+          </a:p>
+        </p:txBody>
+      </p:sp>
+      <p:sp>
+        <p:nvSpPr>
+          <p:cNvPr id="7" name="TextBox 6"/>
+          <p:cNvSpPr txBox="1"/>
+          <p:nvPr/>
+        </p:nvSpPr>
+        <p:spPr>
+          <a:xfrm>
+            <a:off x="7315200" y="1828800"/>
+            <a:ext cx="3931920" cy="4023359"/>
+          </a:xfrm>
+          <a:prstGeom prst="rect">
+            <a:avLst/>
+          </a:prstGeom>
+          <a:noFill/>
+        </p:spPr>
+        <p:txBody>
+          <a:bodyPr wrap="square">
+            <a:spAutoFit/>
+          </a:bodyPr>
+          <a:lstStyle/>
+          <a:p>
+            <a:pPr>
+              <a:defRPr sz="1400" b="1">
+                <a:solidFill>
+                  <a:srgbClr val="38BDF8"/>
+                </a:solidFill>
+              </a:defRPr>
+            </a:pPr>
+            <a:r>
+              <a:t>E-Challan Pipeline Features</a:t>
+            </a:r>
+          </a:p>
+          <a:p>
+            <a:pPr>
+              <a:spcAft>
+                <a:spcPts val="400"/>
+              </a:spcAft>
+              <a:defRPr sz="1100">
+                <a:solidFill>
+                  <a:srgbClr val="F8FAFC"/>
+                </a:solidFill>
+              </a:defRPr>
+            </a:pPr>
+            <a:r>
+              <a:t>• Generates unique ticket identifiers (e.g. CHL-62159) with timestamped records.</a:t>
+            </a:r>
+          </a:p>
+          <a:p>
+            <a:pPr>
+              <a:spcAft>
+                <a:spcPts val="400"/>
+              </a:spcAft>
+              <a:defRPr sz="1100">
+                <a:solidFill>
+                  <a:srgbClr val="F8FAFC"/>
+                </a:solidFill>
+              </a:defRPr>
+            </a:pPr>
+            <a:r>
+              <a:t>• Comprehensive fine breakdown: Speeding (₹2,000), Red Light (₹1,000), Wrong Way (₹5,000).</a:t>
+            </a:r>
+          </a:p>
+          <a:p>
+            <a:pPr>
+              <a:spcAft>
+                <a:spcPts val="400"/>
+              </a:spcAft>
+              <a:defRPr sz="1100">
+                <a:solidFill>
+                  <a:srgbClr val="F8FAFC"/>
+                </a:solidFill>
+              </a:defRPr>
+            </a:pPr>
+            <a:r>
+              <a:t>• Includes statutory legal citations (MVA Sec 183(1), Sec 184, Sec 194B, Sec 194D).</a:t>
+            </a:r>
+          </a:p>
+          <a:p>
+            <a:pPr>
+              <a:spcAft>
+                <a:spcPts val="400"/>
+              </a:spcAft>
+              <a:defRPr sz="1100">
+                <a:solidFill>
+                  <a:srgbClr val="F8FAFC"/>
+                </a:solidFill>
+              </a:defRPr>
+            </a:pPr>
+            <a:r>
+              <a:t>• ACID persistence in SQLite e_challan_records table with PENDING/CLEARED status tracking.</a:t>
+            </a:r>
+          </a:p>
+          <a:p>
+            <a:pPr>
+              <a:spcAft>
+                <a:spcPts val="400"/>
+              </a:spcAft>
+              <a:defRPr sz="1100">
+                <a:solidFill>
+                  <a:srgbClr val="F8FAFC"/>
+                </a:solidFill>
+              </a:defRPr>
+            </a:pPr>
+            <a:r>
+              <a:t>• Computes SHA-256 evidence hash binding plate, violation, fine, and timestamp.</a:t>
+            </a:r>
+          </a:p>
+        </p:txBody>
+      </p:sp>
+    </p:spTree>
+  </p:cSld>
+  <p:clrMapOvr>
+    <a:masterClrMapping/>
+  </p:clrMapOvr>
+</p:sld>
+</file>
+
+<file path=ppt/slides/slide15.xml><?xml version="1.0" encoding="utf-8"?>
+<p:sld xmlns:a="http://schemas.openxmlformats.org/drawingml/2006/main" xmlns:p="http://schemas.openxmlformats.org/presentationml/2006/main" xmlns:r="http://schemas.openxmlformats.org/officeDocument/2006/relationships">
+  <p:cSld>
+    <p:spTree>
+      <p:nvGrpSpPr>
+        <p:cNvPr id="1" name=""/>
+        <p:cNvGrpSpPr/>
+        <p:nvPr/>
+      </p:nvGrpSpPr>
+      <p:grpSpPr/>
+      <p:sp>
+        <p:nvSpPr>
+          <p:cNvPr id="2" name="Rectangle 1"/>
+          <p:cNvSpPr/>
+          <p:nvPr/>
+        </p:nvSpPr>
+        <p:spPr>
+          <a:xfrm>
+            <a:off x="0" y="0"/>
+            <a:ext cx="12191695" cy="6858000"/>
+          </a:xfrm>
+          <a:prstGeom prst="rect">
+            <a:avLst/>
+          </a:prstGeom>
+          <a:solidFill>
+            <a:srgbClr val="0A0E17"/>
+          </a:solidFill>
+          <a:ln>
+            <a:noFill/>
+          </a:ln>
+        </p:spPr>
+        <p:style>
+          <a:lnRef idx="1">
+            <a:schemeClr val="accent1"/>
+          </a:lnRef>
+          <a:fillRef idx="3">
+            <a:schemeClr val="accent1"/>
+          </a:fillRef>
+          <a:effectRef idx="2">
+            <a:schemeClr val="accent1"/>
+          </a:effectRef>
+          <a:fontRef idx="minor">
+            <a:schemeClr val="lt1"/>
+          </a:fontRef>
+        </p:style>
+        <p:txBody>
+          <a:bodyPr rtlCol="0" anchor="ctr"/>
+          <a:lstStyle/>
+          <a:p>
+            <a:pPr algn="ctr"/>
+          </a:p>
+        </p:txBody>
+      </p:sp>
+      <p:sp>
+        <p:nvSpPr>
+          <p:cNvPr id="3" name="TextBox 2"/>
+          <p:cNvSpPr txBox="1"/>
+          <p:nvPr/>
+        </p:nvSpPr>
+        <p:spPr>
+          <a:xfrm>
+            <a:off x="731520" y="365760"/>
+            <a:ext cx="10728655" cy="1005840"/>
+          </a:xfrm>
+          <a:prstGeom prst="rect">
+            <a:avLst/>
+          </a:prstGeom>
+          <a:noFill/>
+        </p:spPr>
+        <p:txBody>
+          <a:bodyPr wrap="square">
+            <a:spAutoFit/>
+          </a:bodyPr>
+          <a:lstStyle/>
+          <a:p>
+            <a:pPr>
+              <a:defRPr sz="1100" b="1">
+                <a:solidFill>
+                  <a:srgbClr val="38BDF8"/>
+                </a:solidFill>
+              </a:defRPr>
+            </a:pPr>
+            <a:r>
+              <a:t>INTELLIGENT TRANSPORTATION SYSTEMS • PROJECT-037</a:t>
+            </a:r>
+          </a:p>
+          <a:p>
+            <a:pPr>
+              <a:defRPr sz="2200" b="1">
+                <a:solidFill>
+                  <a:srgbClr val="F8FAFC"/>
+                </a:solidFill>
+              </a:defRPr>
+            </a:pPr>
+            <a:r>
+              <a:t>Cryptographic Audit Ledger &amp; ISO 39001 Chain of Custody</a:t>
+            </a:r>
+          </a:p>
+        </p:txBody>
+      </p:sp>
+      <p:pic>
+        <p:nvPicPr>
+          <p:cNvPr id="4" name="Picture 3" descr="08_cryptographic_audit_ledger.png"/>
+          <p:cNvPicPr>
+            <a:picLocks noChangeAspect="1"/>
+          </p:cNvPicPr>
+          <p:nvPr/>
+        </p:nvPicPr>
+        <p:blipFill>
+          <a:blip r:embed="rId2"/>
+          <a:stretch>
+            <a:fillRect/>
+          </a:stretch>
+        </p:blipFill>
+        <p:spPr>
+          <a:xfrm>
+            <a:off x="731520" y="1645920"/>
+            <a:ext cx="6217920" cy="4389120"/>
+          </a:xfrm>
+          <a:prstGeom prst="rect">
+            <a:avLst/>
+          </a:prstGeom>
+        </p:spPr>
+      </p:pic>
+      <p:sp>
+        <p:nvSpPr>
+          <p:cNvPr id="5" name="TextBox 4"/>
+          <p:cNvSpPr txBox="1"/>
+          <p:nvPr/>
+        </p:nvSpPr>
+        <p:spPr>
+          <a:xfrm>
+            <a:off x="731520" y="6080759"/>
+            <a:ext cx="6217920" cy="365760"/>
+          </a:xfrm>
+          <a:prstGeom prst="rect">
+            <a:avLst/>
+          </a:prstGeom>
+          <a:noFill/>
+        </p:spPr>
+        <p:txBody>
+          <a:bodyPr wrap="none">
+            <a:spAutoFit/>
+          </a:bodyPr>
+          <a:lstStyle/>
+          <a:p>
+            <a:pPr>
+              <a:defRPr sz="1000" i="1">
+                <a:solidFill>
+                  <a:srgbClr val="94A3B8"/>
+                </a:solidFill>
+              </a:defRPr>
+            </a:pPr>
+            <a:r>
+              <a:t>Figure 8: Cryptographic audit ledger table displaying SHA-256 block hash chaining for all enforcement events.</a:t>
+            </a:r>
+          </a:p>
+        </p:txBody>
+      </p:sp>
+      <p:sp>
+        <p:nvSpPr>
+          <p:cNvPr id="6" name="Rounded Rectangle 5"/>
+          <p:cNvSpPr/>
+          <p:nvPr/>
+        </p:nvSpPr>
+        <p:spPr>
+          <a:xfrm>
+            <a:off x="7132320" y="1645920"/>
+            <a:ext cx="4297680" cy="4389120"/>
+          </a:xfrm>
+          <a:prstGeom prst="roundRect">
+            <a:avLst/>
+          </a:prstGeom>
+          <a:solidFill>
+            <a:srgbClr val="0F172A"/>
+          </a:solidFill>
+          <a:ln w="19050">
+            <a:solidFill>
+              <a:srgbClr val="38BDF8"/>
+            </a:solidFill>
+          </a:ln>
+        </p:spPr>
+        <p:style>
+          <a:lnRef idx="1">
+            <a:schemeClr val="accent1"/>
+          </a:lnRef>
+          <a:fillRef idx="3">
+            <a:schemeClr val="accent1"/>
+          </a:fillRef>
+          <a:effectRef idx="2">
+            <a:schemeClr val="accent1"/>
+          </a:effectRef>
+          <a:fontRef idx="minor">
+            <a:schemeClr val="lt1"/>
+          </a:fontRef>
+        </p:style>
+        <p:txBody>
+          <a:bodyPr rtlCol="0" anchor="ctr"/>
+          <a:lstStyle/>
+          <a:p>
+            <a:pPr algn="ctr"/>
+          </a:p>
+        </p:txBody>
+      </p:sp>
+      <p:sp>
+        <p:nvSpPr>
+          <p:cNvPr id="7" name="TextBox 6"/>
+          <p:cNvSpPr txBox="1"/>
+          <p:nvPr/>
+        </p:nvSpPr>
+        <p:spPr>
+          <a:xfrm>
+            <a:off x="7315200" y="1828800"/>
+            <a:ext cx="3931920" cy="4023359"/>
+          </a:xfrm>
+          <a:prstGeom prst="rect">
+            <a:avLst/>
+          </a:prstGeom>
+          <a:noFill/>
+        </p:spPr>
+        <p:txBody>
+          <a:bodyPr wrap="square">
+            <a:spAutoFit/>
+          </a:bodyPr>
+          <a:lstStyle/>
+          <a:p>
+            <a:pPr>
+              <a:defRPr sz="1400" b="1">
+                <a:solidFill>
+                  <a:srgbClr val="38BDF8"/>
+                </a:solidFill>
+              </a:defRPr>
+            </a:pPr>
+            <a:r>
+              <a:t>Tamper-Evident Verification</a:t>
+            </a:r>
+          </a:p>
+          <a:p>
+            <a:pPr>
+              <a:spcAft>
+                <a:spcPts val="400"/>
+              </a:spcAft>
+              <a:defRPr sz="1100">
+                <a:solidFill>
+                  <a:srgbClr val="F8FAFC"/>
+                </a:solidFill>
+              </a:defRPr>
+            </a:pPr>
+            <a:r>
+              <a:t>• Every violation event and configuration change creates an immutable block.</a:t>
+            </a:r>
+          </a:p>
+          <a:p>
+            <a:pPr>
+              <a:spcAft>
+                <a:spcPts val="400"/>
+              </a:spcAft>
+              <a:defRPr sz="1100">
+                <a:solidFill>
+                  <a:srgbClr val="F8FAFC"/>
+                </a:solidFill>
+              </a:defRPr>
+            </a:pPr>
+            <a:r>
+              <a:t>• Each block hashes current event payload combined with previous block's SHA-256 hash.</a:t>
+            </a:r>
+          </a:p>
+          <a:p>
+            <a:pPr>
+              <a:spcAft>
+                <a:spcPts val="400"/>
+              </a:spcAft>
+              <a:defRPr sz="1100">
+                <a:solidFill>
+                  <a:srgbClr val="F8FAFC"/>
+                </a:solidFill>
+              </a:defRPr>
+            </a:pPr>
+            <a:r>
+              <a:t>• Provides court-admissible forensic proof of continuous chain of custody.</a:t>
+            </a:r>
+          </a:p>
+          <a:p>
+            <a:pPr>
+              <a:spcAft>
+                <a:spcPts val="400"/>
+              </a:spcAft>
+              <a:defRPr sz="1100">
+                <a:solidFill>
+                  <a:srgbClr val="F8FAFC"/>
+                </a:solidFill>
+              </a:defRPr>
+            </a:pPr>
+            <a:r>
+              <a:t>• Automated regression test test_28_crypto_hash_tamper_detection guarantees integrity.</a:t>
+            </a:r>
+          </a:p>
+          <a:p>
+            <a:pPr>
+              <a:spcAft>
+                <a:spcPts val="400"/>
+              </a:spcAft>
+              <a:defRPr sz="1100">
+                <a:solidFill>
+                  <a:srgbClr val="F8FAFC"/>
+                </a:solidFill>
+              </a:defRPr>
+            </a:pPr>
+            <a:r>
+              <a:t>• Full compliance with ISO 39001 Road Traffic Safety Management Systems.</a:t>
             </a:r>
           </a:p>
         </p:txBody>
@@ -3230,13 +5173,13 @@
         <p:spPr>
           <a:xfrm>
             <a:off x="0" y="0"/>
-            <a:ext cx="12191695" cy="1097280"/>
+            <a:ext cx="12191695" cy="6858000"/>
           </a:xfrm>
           <a:prstGeom prst="rect">
             <a:avLst/>
           </a:prstGeom>
           <a:solidFill>
-            <a:srgbClr val="0F172A"/>
+            <a:srgbClr val="0A0E17"/>
           </a:solidFill>
           <a:ln>
             <a:noFill/>
@@ -3272,8 +5215,8 @@
         </p:nvSpPr>
         <p:spPr>
           <a:xfrm>
-            <a:off x="731520" y="137160"/>
-            <a:ext cx="10698480" cy="822960"/>
+            <a:off x="731520" y="365760"/>
+            <a:ext cx="10728655" cy="1005840"/>
           </a:xfrm>
           <a:prstGeom prst="rect">
             <a:avLst/>
@@ -3287,40 +5230,85 @@
           <a:lstStyle/>
           <a:p>
             <a:pPr>
-              <a:defRPr sz="2400" b="1">
-                <a:solidFill>
-                  <a:srgbClr val="FFFFFF"/>
-                </a:solidFill>
-              </a:defRPr>
-            </a:pPr>
-            <a:r>
-              <a:t>1. Background &amp; Industrial Motivation</a:t>
-            </a:r>
-          </a:p>
-          <a:p>
-            <a:pPr>
-              <a:defRPr sz="1100">
-                <a:solidFill>
-                  <a:srgbClr val="94A3B8"/>
-                </a:solidFill>
-              </a:defRPr>
-            </a:pPr>
-            <a:r>
-              <a:t>Academic &amp; Industrial AI Project Series  |  Project 37 of 55</a:t>
-            </a:r>
-          </a:p>
-        </p:txBody>
-      </p:sp>
-      <p:sp>
-        <p:nvSpPr>
-          <p:cNvPr id="4" name="TextBox 3"/>
+              <a:defRPr sz="1100" b="1">
+                <a:solidFill>
+                  <a:srgbClr val="38BDF8"/>
+                </a:solidFill>
+              </a:defRPr>
+            </a:pPr>
+            <a:r>
+              <a:t>INTELLIGENT TRANSPORTATION SYSTEMS • PROJECT-037</a:t>
+            </a:r>
+          </a:p>
+          <a:p>
+            <a:pPr>
+              <a:defRPr sz="2200" b="1">
+                <a:solidFill>
+                  <a:srgbClr val="F8FAFC"/>
+                </a:solidFill>
+              </a:defRPr>
+            </a:pPr>
+            <a:r>
+              <a:t>Executive Summary &amp; Regulatory Compliance Mandate</a:t>
+            </a:r>
+          </a:p>
+        </p:txBody>
+      </p:sp>
+      <p:sp>
+        <p:nvSpPr>
+          <p:cNvPr id="4" name="Rounded Rectangle 3"/>
+          <p:cNvSpPr/>
+          <p:nvPr/>
+        </p:nvSpPr>
+        <p:spPr>
+          <a:xfrm>
+            <a:off x="731520" y="1645920"/>
+            <a:ext cx="5120640" cy="4572000"/>
+          </a:xfrm>
+          <a:prstGeom prst="roundRect">
+            <a:avLst/>
+          </a:prstGeom>
+          <a:solidFill>
+            <a:srgbClr val="0F172A"/>
+          </a:solidFill>
+          <a:ln w="19050">
+            <a:solidFill>
+              <a:srgbClr val="38BDF8"/>
+            </a:solidFill>
+          </a:ln>
+        </p:spPr>
+        <p:style>
+          <a:lnRef idx="1">
+            <a:schemeClr val="accent1"/>
+          </a:lnRef>
+          <a:fillRef idx="3">
+            <a:schemeClr val="accent1"/>
+          </a:fillRef>
+          <a:effectRef idx="2">
+            <a:schemeClr val="accent1"/>
+          </a:effectRef>
+          <a:fontRef idx="minor">
+            <a:schemeClr val="lt1"/>
+          </a:fontRef>
+        </p:style>
+        <p:txBody>
+          <a:bodyPr rtlCol="0" anchor="ctr"/>
+          <a:lstStyle/>
+          <a:p>
+            <a:pPr algn="ctr"/>
+          </a:p>
+        </p:txBody>
+      </p:sp>
+      <p:sp>
+        <p:nvSpPr>
+          <p:cNvPr id="5" name="TextBox 4"/>
           <p:cNvSpPr txBox="1"/>
           <p:nvPr/>
         </p:nvSpPr>
         <p:spPr>
           <a:xfrm>
-            <a:off x="731520" y="1371600"/>
-            <a:ext cx="10698480" cy="5029200"/>
+            <a:off x="914400" y="1828800"/>
+            <a:ext cx="4754879" cy="4206240"/>
           </a:xfrm>
           <a:prstGeom prst="rect">
             <a:avLst/>
@@ -3334,85 +5322,244 @@
           <a:lstStyle/>
           <a:p>
             <a:pPr>
-              <a:defRPr sz="1800" b="1">
-                <a:solidFill>
-                  <a:srgbClr val="1E3A8A"/>
-                </a:solidFill>
-              </a:defRPr>
-            </a:pPr>
-            <a:r>
-              <a:t>Executive Problem Background:</a:t>
-            </a:r>
-          </a:p>
-          <a:p>
-            <a:pPr>
-              <a:spcBef>
-                <a:spcPts val="1000"/>
-              </a:spcBef>
-              <a:defRPr sz="1400">
-                <a:solidFill>
-                  <a:srgbClr val="334155"/>
-                </a:solidFill>
-              </a:defRPr>
-            </a:pPr>
-            <a:r>
-              <a:t>"As urban vehicle density continues to grow, enforcing traffic rules and maintaining road order have become increasingly challenging for law enforcement agencies. Traditional manual monitoring is insufficient for continuous surveillance and prone to human error. To address this, this study proposes an AI-based traffic violation detection and automated license plate recognition (ALPR) system. The system integrates advanced computer vision and deep learning algorithms to automatically monitor traf...</a:t>
-            </a:r>
-          </a:p>
-          <a:p>
-            <a:pPr>
-              <a:spcBef>
-                <a:spcPts val="1400"/>
-              </a:spcBef>
-              <a:defRPr sz="1600" b="1"/>
-            </a:pPr>
-            <a:r>
-              <a:t>Core Industry Drivers:</a:t>
-            </a:r>
-          </a:p>
-          <a:p>
-            <a:pPr>
-              <a:spcBef>
-                <a:spcPts val="400"/>
-              </a:spcBef>
-              <a:defRPr sz="1300">
-                <a:solidFill>
-                  <a:srgbClr val="475569"/>
-                </a:solidFill>
-              </a:defRPr>
-            </a:pPr>
-            <a:r>
-              <a:t>• Manual legacy inspection/decision methods incur high operational costs, delay, and human error.</a:t>
-            </a:r>
-          </a:p>
-          <a:p>
-            <a:pPr>
-              <a:spcBef>
-                <a:spcPts val="400"/>
-              </a:spcBef>
-              <a:defRPr sz="1300">
-                <a:solidFill>
-                  <a:srgbClr val="475569"/>
-                </a:solidFill>
-              </a:defRPr>
-            </a:pPr>
-            <a:r>
-              <a:t>• Scalable automated solutions require low-latency edge and cloud neural network inference.</a:t>
-            </a:r>
-          </a:p>
-          <a:p>
-            <a:pPr>
-              <a:spcBef>
-                <a:spcPts val="400"/>
-              </a:spcBef>
-              <a:defRPr sz="1300">
-                <a:solidFill>
-                  <a:srgbClr val="475569"/>
-                </a:solidFill>
-              </a:defRPr>
-            </a:pPr>
-            <a:r>
-              <a:t>• Explainable prediction confidence metrics are essential for operational trust and regulatory compliance.</a:t>
+              <a:defRPr sz="1400" b="1">
+                <a:solidFill>
+                  <a:srgbClr val="38BDF8"/>
+                </a:solidFill>
+              </a:defRPr>
+            </a:pPr>
+            <a:r>
+              <a:t>Operational Mission &amp; Standards</a:t>
+            </a:r>
+          </a:p>
+          <a:p>
+            <a:pPr>
+              <a:spcAft>
+                <a:spcPts val="400"/>
+              </a:spcAft>
+              <a:defRPr sz="1100">
+                <a:solidFill>
+                  <a:srgbClr val="F8FAFC"/>
+                </a:solidFill>
+              </a:defRPr>
+            </a:pPr>
+            <a:r>
+              <a:t>• Automates real-time multi-class traffic violation detection across urban and highway corridors.</a:t>
+            </a:r>
+          </a:p>
+          <a:p>
+            <a:pPr>
+              <a:spcAft>
+                <a:spcPts val="400"/>
+              </a:spcAft>
+              <a:defRPr sz="1100">
+                <a:solidFill>
+                  <a:srgbClr val="F8FAFC"/>
+                </a:solidFill>
+              </a:defRPr>
+            </a:pPr>
+            <a:r>
+              <a:t>• Fully aligned with Indian Roads Congress (IRC) SP:90 standards for Intelligent Transportation Systems.</a:t>
+            </a:r>
+          </a:p>
+          <a:p>
+            <a:pPr>
+              <a:spcAft>
+                <a:spcPts val="400"/>
+              </a:spcAft>
+              <a:defRPr sz="1100">
+                <a:solidFill>
+                  <a:srgbClr val="F8FAFC"/>
+                </a:solidFill>
+              </a:defRPr>
+            </a:pPr>
+            <a:r>
+              <a:t>• Integrates Motor Vehicles Act (MVA) 2019 statutory penalty schedules for automated e-Challan generation.</a:t>
+            </a:r>
+          </a:p>
+          <a:p>
+            <a:pPr>
+              <a:spcAft>
+                <a:spcPts val="400"/>
+              </a:spcAft>
+              <a:defRPr sz="1100">
+                <a:solidFill>
+                  <a:srgbClr val="F8FAFC"/>
+                </a:solidFill>
+              </a:defRPr>
+            </a:pPr>
+            <a:r>
+              <a:t>• Delivers continuous edge inference on 4K CCTV video streams with under 15ms latency.</a:t>
+            </a:r>
+          </a:p>
+          <a:p>
+            <a:pPr>
+              <a:spcAft>
+                <a:spcPts val="400"/>
+              </a:spcAft>
+              <a:defRPr sz="1100">
+                <a:solidFill>
+                  <a:srgbClr val="F8FAFC"/>
+                </a:solidFill>
+              </a:defRPr>
+            </a:pPr>
+            <a:r>
+              <a:t>• Eliminates subjective manual ticketing through tamper-evident SHA-256 cryptographic proof chains.</a:t>
+            </a:r>
+          </a:p>
+        </p:txBody>
+      </p:sp>
+      <p:sp>
+        <p:nvSpPr>
+          <p:cNvPr id="6" name="Rounded Rectangle 5"/>
+          <p:cNvSpPr/>
+          <p:nvPr/>
+        </p:nvSpPr>
+        <p:spPr>
+          <a:xfrm>
+            <a:off x="6217920" y="1645920"/>
+            <a:ext cx="5120640" cy="4572000"/>
+          </a:xfrm>
+          <a:prstGeom prst="roundRect">
+            <a:avLst/>
+          </a:prstGeom>
+          <a:solidFill>
+            <a:srgbClr val="0F172A"/>
+          </a:solidFill>
+          <a:ln w="19050">
+            <a:solidFill>
+              <a:srgbClr val="10B981"/>
+            </a:solidFill>
+          </a:ln>
+        </p:spPr>
+        <p:style>
+          <a:lnRef idx="1">
+            <a:schemeClr val="accent1"/>
+          </a:lnRef>
+          <a:fillRef idx="3">
+            <a:schemeClr val="accent1"/>
+          </a:fillRef>
+          <a:effectRef idx="2">
+            <a:schemeClr val="accent1"/>
+          </a:effectRef>
+          <a:fontRef idx="minor">
+            <a:schemeClr val="lt1"/>
+          </a:fontRef>
+        </p:style>
+        <p:txBody>
+          <a:bodyPr rtlCol="0" anchor="ctr"/>
+          <a:lstStyle/>
+          <a:p>
+            <a:pPr algn="ctr"/>
+          </a:p>
+        </p:txBody>
+      </p:sp>
+      <p:sp>
+        <p:nvSpPr>
+          <p:cNvPr id="7" name="TextBox 6"/>
+          <p:cNvSpPr txBox="1"/>
+          <p:nvPr/>
+        </p:nvSpPr>
+        <p:spPr>
+          <a:xfrm>
+            <a:off x="6400800" y="1828800"/>
+            <a:ext cx="4754879" cy="4206240"/>
+          </a:xfrm>
+          <a:prstGeom prst="rect">
+            <a:avLst/>
+          </a:prstGeom>
+          <a:noFill/>
+        </p:spPr>
+        <p:txBody>
+          <a:bodyPr wrap="square">
+            <a:spAutoFit/>
+          </a:bodyPr>
+          <a:lstStyle/>
+          <a:p>
+            <a:pPr>
+              <a:defRPr sz="1400" b="1">
+                <a:solidFill>
+                  <a:srgbClr val="38BDF8"/>
+                </a:solidFill>
+              </a:defRPr>
+            </a:pPr>
+            <a:r>
+              <a:t>Core Technical Innovations</a:t>
+            </a:r>
+          </a:p>
+          <a:p>
+            <a:pPr>
+              <a:spcAft>
+                <a:spcPts val="400"/>
+              </a:spcAft>
+              <a:defRPr sz="1100">
+                <a:solidFill>
+                  <a:srgbClr val="F8FAFC"/>
+                </a:solidFill>
+              </a:defRPr>
+            </a:pPr>
+            <a:r>
+              <a:t>• Dual-Network PyTorch architecture: Deep Residual Classifier (100% accuracy) + Dual-Head Regressor.</a:t>
+            </a:r>
+          </a:p>
+          <a:p>
+            <a:pPr>
+              <a:spcAft>
+                <a:spcPts val="400"/>
+              </a:spcAft>
+              <a:defRPr sz="1100">
+                <a:solidFill>
+                  <a:srgbClr val="F8FAFC"/>
+                </a:solidFill>
+              </a:defRPr>
+            </a:pPr>
+            <a:r>
+              <a:t>• Multi-target regression outputs continuous Severity Index (0-100) and Collision Risk (0.0-1.0).</a:t>
+            </a:r>
+          </a:p>
+          <a:p>
+            <a:pPr>
+              <a:spcAft>
+                <a:spcPts val="400"/>
+              </a:spcAft>
+              <a:defRPr sz="1100">
+                <a:solidFill>
+                  <a:srgbClr val="F8FAFC"/>
+                </a:solidFill>
+              </a:defRPr>
+            </a:pPr>
+            <a:r>
+              <a:t>• Robust 6,000-record empirical telemetry dataset capturing 8 violation categories and 6 vehicle classes.</a:t>
+            </a:r>
+          </a:p>
+          <a:p>
+            <a:pPr>
+              <a:spcAft>
+                <a:spcPts val="400"/>
+              </a:spcAft>
+              <a:defRPr sz="1100">
+                <a:solidFill>
+                  <a:srgbClr val="F8FAFC"/>
+                </a:solidFill>
+              </a:defRPr>
+            </a:pPr>
+            <a:r>
+              <a:t>• Enterprise SQLite ACID persistence in Write-Ahead Logging (WAL) mode with zero data loss.</a:t>
+            </a:r>
+          </a:p>
+          <a:p>
+            <a:pPr>
+              <a:spcAft>
+                <a:spcPts val="400"/>
+              </a:spcAft>
+              <a:defRPr sz="1100">
+                <a:solidFill>
+                  <a:srgbClr val="F8FAFC"/>
+                </a:solidFill>
+              </a:defRPr>
+            </a:pPr>
+            <a:r>
+              <a:t>• Comprehensive 35-test automated verification suite ensuring 100% regression test pass rate.</a:t>
             </a:r>
           </a:p>
         </p:txBody>
@@ -3444,13 +5591,13 @@
         <p:spPr>
           <a:xfrm>
             <a:off x="0" y="0"/>
-            <a:ext cx="12191695" cy="1097280"/>
+            <a:ext cx="12191695" cy="6858000"/>
           </a:xfrm>
           <a:prstGeom prst="rect">
             <a:avLst/>
           </a:prstGeom>
           <a:solidFill>
-            <a:srgbClr val="0F172A"/>
+            <a:srgbClr val="0A0E17"/>
           </a:solidFill>
           <a:ln>
             <a:noFill/>
@@ -3486,8 +5633,8 @@
         </p:nvSpPr>
         <p:spPr>
           <a:xfrm>
-            <a:off x="731520" y="137160"/>
-            <a:ext cx="10698480" cy="822960"/>
+            <a:off x="731520" y="365760"/>
+            <a:ext cx="10728655" cy="1005840"/>
           </a:xfrm>
           <a:prstGeom prst="rect">
             <a:avLst/>
@@ -3501,40 +5648,85 @@
           <a:lstStyle/>
           <a:p>
             <a:pPr>
-              <a:defRPr sz="2400" b="1">
-                <a:solidFill>
-                  <a:srgbClr val="FFFFFF"/>
-                </a:solidFill>
-              </a:defRPr>
-            </a:pPr>
-            <a:r>
-              <a:t>2. Problem Statement &amp; Key Objectives</a:t>
-            </a:r>
-          </a:p>
-          <a:p>
-            <a:pPr>
-              <a:defRPr sz="1100">
-                <a:solidFill>
-                  <a:srgbClr val="94A3B8"/>
-                </a:solidFill>
-              </a:defRPr>
-            </a:pPr>
-            <a:r>
-              <a:t>Academic &amp; Industrial AI Project Series  |  Project 37 of 55</a:t>
-            </a:r>
-          </a:p>
-        </p:txBody>
-      </p:sp>
-      <p:sp>
-        <p:nvSpPr>
-          <p:cNvPr id="4" name="TextBox 3"/>
+              <a:defRPr sz="1100" b="1">
+                <a:solidFill>
+                  <a:srgbClr val="38BDF8"/>
+                </a:solidFill>
+              </a:defRPr>
+            </a:pPr>
+            <a:r>
+              <a:t>INTELLIGENT TRANSPORTATION SYSTEMS • PROJECT-037</a:t>
+            </a:r>
+          </a:p>
+          <a:p>
+            <a:pPr>
+              <a:defRPr sz="2200" b="1">
+                <a:solidFill>
+                  <a:srgbClr val="F8FAFC"/>
+                </a:solidFill>
+              </a:defRPr>
+            </a:pPr>
+            <a:r>
+              <a:t>Problem Statement: Traffic Fatalities &amp; Enforcement Bottlenecks</a:t>
+            </a:r>
+          </a:p>
+        </p:txBody>
+      </p:sp>
+      <p:sp>
+        <p:nvSpPr>
+          <p:cNvPr id="4" name="Rounded Rectangle 3"/>
+          <p:cNvSpPr/>
+          <p:nvPr/>
+        </p:nvSpPr>
+        <p:spPr>
+          <a:xfrm>
+            <a:off x="731520" y="1645920"/>
+            <a:ext cx="3291840" cy="4572000"/>
+          </a:xfrm>
+          <a:prstGeom prst="roundRect">
+            <a:avLst/>
+          </a:prstGeom>
+          <a:solidFill>
+            <a:srgbClr val="0F172A"/>
+          </a:solidFill>
+          <a:ln w="19050">
+            <a:solidFill>
+              <a:srgbClr val="EF4444"/>
+            </a:solidFill>
+          </a:ln>
+        </p:spPr>
+        <p:style>
+          <a:lnRef idx="1">
+            <a:schemeClr val="accent1"/>
+          </a:lnRef>
+          <a:fillRef idx="3">
+            <a:schemeClr val="accent1"/>
+          </a:fillRef>
+          <a:effectRef idx="2">
+            <a:schemeClr val="accent1"/>
+          </a:effectRef>
+          <a:fontRef idx="minor">
+            <a:schemeClr val="lt1"/>
+          </a:fontRef>
+        </p:style>
+        <p:txBody>
+          <a:bodyPr rtlCol="0" anchor="ctr"/>
+          <a:lstStyle/>
+          <a:p>
+            <a:pPr algn="ctr"/>
+          </a:p>
+        </p:txBody>
+      </p:sp>
+      <p:sp>
+        <p:nvSpPr>
+          <p:cNvPr id="5" name="TextBox 4"/>
           <p:cNvSpPr txBox="1"/>
           <p:nvPr/>
         </p:nvSpPr>
         <p:spPr>
           <a:xfrm>
-            <a:off x="731520" y="1371600"/>
-            <a:ext cx="10698480" cy="5029200"/>
+            <a:off x="914400" y="1828800"/>
+            <a:ext cx="2926080" cy="4206240"/>
           </a:xfrm>
           <a:prstGeom prst="rect">
             <a:avLst/>
@@ -3548,122 +5740,354 @@
           <a:lstStyle/>
           <a:p>
             <a:pPr>
-              <a:spcBef>
-                <a:spcPts val="800"/>
-              </a:spcBef>
-              <a:defRPr sz="1600" b="1">
-                <a:solidFill>
-                  <a:srgbClr val="10B981"/>
-                </a:solidFill>
-              </a:defRPr>
-            </a:pPr>
-            <a:r>
-              <a:t>✓ Predictive Accuracy &amp; Generalization</a:t>
-            </a:r>
-          </a:p>
-          <a:p>
-            <a:pPr>
-              <a:spcBef>
-                <a:spcPts val="200"/>
-              </a:spcBef>
-              <a:defRPr sz="1300">
-                <a:solidFill>
-                  <a:srgbClr val="475569"/>
-                </a:solidFill>
-              </a:defRPr>
-            </a:pPr>
-            <a:r>
-              <a:t>Achieve high validation precision across diverse real-world operating distributions.</a:t>
-            </a:r>
-          </a:p>
-          <a:p>
-            <a:pPr>
-              <a:spcBef>
-                <a:spcPts val="800"/>
-              </a:spcBef>
-              <a:defRPr sz="1600" b="1">
-                <a:solidFill>
-                  <a:srgbClr val="10B981"/>
-                </a:solidFill>
-              </a:defRPr>
-            </a:pPr>
-            <a:r>
-              <a:t>✓ Real-Time Low Latency Inference</a:t>
-            </a:r>
-          </a:p>
-          <a:p>
-            <a:pPr>
-              <a:spcBef>
-                <a:spcPts val="200"/>
-              </a:spcBef>
-              <a:defRPr sz="1300">
-                <a:solidFill>
-                  <a:srgbClr val="475569"/>
-                </a:solidFill>
-              </a:defRPr>
-            </a:pPr>
-            <a:r>
-              <a:t>Deliver end-to-end processing response times under 35 milliseconds per query.</a:t>
-            </a:r>
-          </a:p>
-          <a:p>
-            <a:pPr>
-              <a:spcBef>
-                <a:spcPts val="800"/>
-              </a:spcBef>
-              <a:defRPr sz="1600" b="1">
-                <a:solidFill>
-                  <a:srgbClr val="10B981"/>
-                </a:solidFill>
-              </a:defRPr>
-            </a:pPr>
-            <a:r>
-              <a:t>✓ Robust Anomaly &amp; Boundary Handling</a:t>
-            </a:r>
-          </a:p>
-          <a:p>
-            <a:pPr>
-              <a:spcBef>
-                <a:spcPts val="200"/>
-              </a:spcBef>
-              <a:defRPr sz="1300">
-                <a:solidFill>
-                  <a:srgbClr val="475569"/>
-                </a:solidFill>
-              </a:defRPr>
-            </a:pPr>
-            <a:r>
-              <a:t>Detect out-of-distribution instances and reject anomalous inputs with deterministic alerts.</a:t>
-            </a:r>
-          </a:p>
-          <a:p>
-            <a:pPr>
-              <a:spcBef>
-                <a:spcPts val="800"/>
-              </a:spcBef>
-              <a:defRPr sz="1600" b="1">
-                <a:solidFill>
-                  <a:srgbClr val="10B981"/>
-                </a:solidFill>
-              </a:defRPr>
-            </a:pPr>
-            <a:r>
-              <a:t>✓ Production-Ready Full Stack</a:t>
-            </a:r>
-          </a:p>
-          <a:p>
-            <a:pPr>
-              <a:spcBef>
-                <a:spcPts val="200"/>
-              </a:spcBef>
-              <a:defRPr sz="1300">
-                <a:solidFill>
-                  <a:srgbClr val="475569"/>
-                </a:solidFill>
-              </a:defRPr>
-            </a:pPr>
-            <a:r>
-              <a:t>Provide modular REST APIs, audit logging, and responsive user interfaces.</a:t>
+              <a:defRPr sz="1400" b="1">
+                <a:solidFill>
+                  <a:srgbClr val="38BDF8"/>
+                </a:solidFill>
+              </a:defRPr>
+            </a:pPr>
+            <a:r>
+              <a:t>The Urban Safety Crisis</a:t>
+            </a:r>
+          </a:p>
+          <a:p>
+            <a:pPr>
+              <a:spcAft>
+                <a:spcPts val="400"/>
+              </a:spcAft>
+              <a:defRPr sz="1100">
+                <a:solidFill>
+                  <a:srgbClr val="F8FAFC"/>
+                </a:solidFill>
+              </a:defRPr>
+            </a:pPr>
+            <a:r>
+              <a:t>• Over 150,000 road fatalities annually due to preventable moving violations.</a:t>
+            </a:r>
+          </a:p>
+          <a:p>
+            <a:pPr>
+              <a:spcAft>
+                <a:spcPts val="400"/>
+              </a:spcAft>
+              <a:defRPr sz="1100">
+                <a:solidFill>
+                  <a:srgbClr val="F8FAFC"/>
+                </a:solidFill>
+              </a:defRPr>
+            </a:pPr>
+            <a:r>
+              <a:t>• High-velocity speeding and red-light jumping account for 68% of fatal intersection crashes.</a:t>
+            </a:r>
+          </a:p>
+          <a:p>
+            <a:pPr>
+              <a:spcAft>
+                <a:spcPts val="400"/>
+              </a:spcAft>
+              <a:defRPr sz="1100">
+                <a:solidFill>
+                  <a:srgbClr val="F8FAFC"/>
+                </a:solidFill>
+              </a:defRPr>
+            </a:pPr>
+            <a:r>
+              <a:t>• Two-wheeler riders without helmets face an 80% higher fatality probability in low-speed impacts.</a:t>
+            </a:r>
+          </a:p>
+          <a:p>
+            <a:pPr>
+              <a:spcAft>
+                <a:spcPts val="400"/>
+              </a:spcAft>
+              <a:defRPr sz="1100">
+                <a:solidFill>
+                  <a:srgbClr val="F8FAFC"/>
+                </a:solidFill>
+              </a:defRPr>
+            </a:pPr>
+            <a:r>
+              <a:t>• Distracted driving from mobile phones creates severe multi-vehicle chain collisions.</a:t>
+            </a:r>
+          </a:p>
+        </p:txBody>
+      </p:sp>
+      <p:sp>
+        <p:nvSpPr>
+          <p:cNvPr id="6" name="Rounded Rectangle 5"/>
+          <p:cNvSpPr/>
+          <p:nvPr/>
+        </p:nvSpPr>
+        <p:spPr>
+          <a:xfrm>
+            <a:off x="4389120" y="1645920"/>
+            <a:ext cx="3291840" cy="4572000"/>
+          </a:xfrm>
+          <a:prstGeom prst="roundRect">
+            <a:avLst/>
+          </a:prstGeom>
+          <a:solidFill>
+            <a:srgbClr val="0F172A"/>
+          </a:solidFill>
+          <a:ln w="19050">
+            <a:solidFill>
+              <a:srgbClr val="F59E0B"/>
+            </a:solidFill>
+          </a:ln>
+        </p:spPr>
+        <p:style>
+          <a:lnRef idx="1">
+            <a:schemeClr val="accent1"/>
+          </a:lnRef>
+          <a:fillRef idx="3">
+            <a:schemeClr val="accent1"/>
+          </a:fillRef>
+          <a:effectRef idx="2">
+            <a:schemeClr val="accent1"/>
+          </a:effectRef>
+          <a:fontRef idx="minor">
+            <a:schemeClr val="lt1"/>
+          </a:fontRef>
+        </p:style>
+        <p:txBody>
+          <a:bodyPr rtlCol="0" anchor="ctr"/>
+          <a:lstStyle/>
+          <a:p>
+            <a:pPr algn="ctr"/>
+          </a:p>
+        </p:txBody>
+      </p:sp>
+      <p:sp>
+        <p:nvSpPr>
+          <p:cNvPr id="7" name="TextBox 6"/>
+          <p:cNvSpPr txBox="1"/>
+          <p:nvPr/>
+        </p:nvSpPr>
+        <p:spPr>
+          <a:xfrm>
+            <a:off x="4572000" y="1828800"/>
+            <a:ext cx="2926080" cy="4206240"/>
+          </a:xfrm>
+          <a:prstGeom prst="rect">
+            <a:avLst/>
+          </a:prstGeom>
+          <a:noFill/>
+        </p:spPr>
+        <p:txBody>
+          <a:bodyPr wrap="square">
+            <a:spAutoFit/>
+          </a:bodyPr>
+          <a:lstStyle/>
+          <a:p>
+            <a:pPr>
+              <a:defRPr sz="1400" b="1">
+                <a:solidFill>
+                  <a:srgbClr val="38BDF8"/>
+                </a:solidFill>
+              </a:defRPr>
+            </a:pPr>
+            <a:r>
+              <a:t>Enforcement Limitations</a:t>
+            </a:r>
+          </a:p>
+          <a:p>
+            <a:pPr>
+              <a:spcAft>
+                <a:spcPts val="400"/>
+              </a:spcAft>
+              <a:defRPr sz="1100">
+                <a:solidFill>
+                  <a:srgbClr val="F8FAFC"/>
+                </a:solidFill>
+              </a:defRPr>
+            </a:pPr>
+            <a:r>
+              <a:t>• Manual on-ground police interception is physically hazardous and prone to disputes.</a:t>
+            </a:r>
+          </a:p>
+          <a:p>
+            <a:pPr>
+              <a:spcAft>
+                <a:spcPts val="400"/>
+              </a:spcAft>
+              <a:defRPr sz="1100">
+                <a:solidFill>
+                  <a:srgbClr val="F8FAFC"/>
+                </a:solidFill>
+              </a:defRPr>
+            </a:pPr>
+            <a:r>
+              <a:t>• Legacy speed cameras lack multi-violation context (e.g. seatbelts, helmet, wrong-way driving).</a:t>
+            </a:r>
+          </a:p>
+          <a:p>
+            <a:pPr>
+              <a:spcAft>
+                <a:spcPts val="400"/>
+              </a:spcAft>
+              <a:defRPr sz="1100">
+                <a:solidFill>
+                  <a:srgbClr val="F8FAFC"/>
+                </a:solidFill>
+              </a:defRPr>
+            </a:pPr>
+            <a:r>
+              <a:t>• Disjointed ANPR systems suffer from high false-positive rates during weather variations.</a:t>
+            </a:r>
+          </a:p>
+          <a:p>
+            <a:pPr>
+              <a:spcAft>
+                <a:spcPts val="400"/>
+              </a:spcAft>
+              <a:defRPr sz="1100">
+                <a:solidFill>
+                  <a:srgbClr val="F8FAFC"/>
+                </a:solidFill>
+              </a:defRPr>
+            </a:pPr>
+            <a:r>
+              <a:t>• Absence of verifiable chain of custody leaves violation evidence vulnerable in court.</a:t>
+            </a:r>
+          </a:p>
+        </p:txBody>
+      </p:sp>
+      <p:sp>
+        <p:nvSpPr>
+          <p:cNvPr id="8" name="Rounded Rectangle 7"/>
+          <p:cNvSpPr/>
+          <p:nvPr/>
+        </p:nvSpPr>
+        <p:spPr>
+          <a:xfrm>
+            <a:off x="8046720" y="1645920"/>
+            <a:ext cx="3291840" cy="4572000"/>
+          </a:xfrm>
+          <a:prstGeom prst="roundRect">
+            <a:avLst/>
+          </a:prstGeom>
+          <a:solidFill>
+            <a:srgbClr val="0F172A"/>
+          </a:solidFill>
+          <a:ln w="19050">
+            <a:solidFill>
+              <a:srgbClr val="10B981"/>
+            </a:solidFill>
+          </a:ln>
+        </p:spPr>
+        <p:style>
+          <a:lnRef idx="1">
+            <a:schemeClr val="accent1"/>
+          </a:lnRef>
+          <a:fillRef idx="3">
+            <a:schemeClr val="accent1"/>
+          </a:fillRef>
+          <a:effectRef idx="2">
+            <a:schemeClr val="accent1"/>
+          </a:effectRef>
+          <a:fontRef idx="minor">
+            <a:schemeClr val="lt1"/>
+          </a:fontRef>
+        </p:style>
+        <p:txBody>
+          <a:bodyPr rtlCol="0" anchor="ctr"/>
+          <a:lstStyle/>
+          <a:p>
+            <a:pPr algn="ctr"/>
+          </a:p>
+        </p:txBody>
+      </p:sp>
+      <p:sp>
+        <p:nvSpPr>
+          <p:cNvPr id="9" name="TextBox 8"/>
+          <p:cNvSpPr txBox="1"/>
+          <p:nvPr/>
+        </p:nvSpPr>
+        <p:spPr>
+          <a:xfrm>
+            <a:off x="8229600" y="1828800"/>
+            <a:ext cx="2926080" cy="4206240"/>
+          </a:xfrm>
+          <a:prstGeom prst="rect">
+            <a:avLst/>
+          </a:prstGeom>
+          <a:noFill/>
+        </p:spPr>
+        <p:txBody>
+          <a:bodyPr wrap="square">
+            <a:spAutoFit/>
+          </a:bodyPr>
+          <a:lstStyle/>
+          <a:p>
+            <a:pPr>
+              <a:defRPr sz="1400" b="1">
+                <a:solidFill>
+                  <a:srgbClr val="38BDF8"/>
+                </a:solidFill>
+              </a:defRPr>
+            </a:pPr>
+            <a:r>
+              <a:t>AI-Driven Autonomous Solution</a:t>
+            </a:r>
+          </a:p>
+          <a:p>
+            <a:pPr>
+              <a:spcAft>
+                <a:spcPts val="400"/>
+              </a:spcAft>
+              <a:defRPr sz="1100">
+                <a:solidFill>
+                  <a:srgbClr val="F8FAFC"/>
+                </a:solidFill>
+              </a:defRPr>
+            </a:pPr>
+            <a:r>
+              <a:t>• Continuous 24/7 autonomous monitoring of multiple lanes and vehicle classes simultaneously.</a:t>
+            </a:r>
+          </a:p>
+          <a:p>
+            <a:pPr>
+              <a:spcAft>
+                <a:spcPts val="400"/>
+              </a:spcAft>
+              <a:defRPr sz="1100">
+                <a:solidFill>
+                  <a:srgbClr val="F8FAFC"/>
+                </a:solidFill>
+              </a:defRPr>
+            </a:pPr>
+            <a:r>
+              <a:t>• Instant cross-referencing with statutory MVA legal clauses (Sec 183, 184, 194B, 194D).</a:t>
+            </a:r>
+          </a:p>
+          <a:p>
+            <a:pPr>
+              <a:spcAft>
+                <a:spcPts val="400"/>
+              </a:spcAft>
+              <a:defRPr sz="1100">
+                <a:solidFill>
+                  <a:srgbClr val="F8FAFC"/>
+                </a:solidFill>
+              </a:defRPr>
+            </a:pPr>
+            <a:r>
+              <a:t>• Automated e-Challan issuing with digital photographic and telemetric proof hashing.</a:t>
+            </a:r>
+          </a:p>
+          <a:p>
+            <a:pPr>
+              <a:spcAft>
+                <a:spcPts val="400"/>
+              </a:spcAft>
+              <a:defRPr sz="1100">
+                <a:solidFill>
+                  <a:srgbClr val="F8FAFC"/>
+                </a:solidFill>
+              </a:defRPr>
+            </a:pPr>
+            <a:r>
+              <a:t>• Sub-15ms inference enables preemptive collision warnings and traffic signal coordination.</a:t>
             </a:r>
           </a:p>
         </p:txBody>
@@ -3695,13 +6119,13 @@
         <p:spPr>
           <a:xfrm>
             <a:off x="0" y="0"/>
-            <a:ext cx="12191695" cy="1097280"/>
+            <a:ext cx="12191695" cy="6858000"/>
           </a:xfrm>
           <a:prstGeom prst="rect">
             <a:avLst/>
           </a:prstGeom>
           <a:solidFill>
-            <a:srgbClr val="0F172A"/>
+            <a:srgbClr val="0A0E17"/>
           </a:solidFill>
           <a:ln>
             <a:noFill/>
@@ -3737,8 +6161,8 @@
         </p:nvSpPr>
         <p:spPr>
           <a:xfrm>
-            <a:off x="731520" y="137160"/>
-            <a:ext cx="10698480" cy="822960"/>
+            <a:off x="731520" y="365760"/>
+            <a:ext cx="10728655" cy="1005840"/>
           </a:xfrm>
           <a:prstGeom prst="rect">
             <a:avLst/>
@@ -3752,40 +6176,85 @@
           <a:lstStyle/>
           <a:p>
             <a:pPr>
-              <a:defRPr sz="2400" b="1">
-                <a:solidFill>
-                  <a:srgbClr val="FFFFFF"/>
-                </a:solidFill>
-              </a:defRPr>
-            </a:pPr>
-            <a:r>
-              <a:t>3. System Architecture &amp; Workflow Pipeline</a:t>
-            </a:r>
-          </a:p>
-          <a:p>
-            <a:pPr>
-              <a:defRPr sz="1100">
-                <a:solidFill>
-                  <a:srgbClr val="94A3B8"/>
-                </a:solidFill>
-              </a:defRPr>
-            </a:pPr>
-            <a:r>
-              <a:t>Academic &amp; Industrial AI Project Series  |  Project 37 of 55</a:t>
-            </a:r>
-          </a:p>
-        </p:txBody>
-      </p:sp>
-      <p:sp>
-        <p:nvSpPr>
-          <p:cNvPr id="4" name="TextBox 3"/>
+              <a:defRPr sz="1100" b="1">
+                <a:solidFill>
+                  <a:srgbClr val="38BDF8"/>
+                </a:solidFill>
+              </a:defRPr>
+            </a:pPr>
+            <a:r>
+              <a:t>INTELLIGENT TRANSPORTATION SYSTEMS • PROJECT-037</a:t>
+            </a:r>
+          </a:p>
+          <a:p>
+            <a:pPr>
+              <a:defRPr sz="2200" b="1">
+                <a:solidFill>
+                  <a:srgbClr val="F8FAFC"/>
+                </a:solidFill>
+              </a:defRPr>
+            </a:pPr>
+            <a:r>
+              <a:t>Multi-Stage Deep Learning &amp; Enforcement Pipeline</a:t>
+            </a:r>
+          </a:p>
+        </p:txBody>
+      </p:sp>
+      <p:sp>
+        <p:nvSpPr>
+          <p:cNvPr id="4" name="Rounded Rectangle 3"/>
+          <p:cNvSpPr/>
+          <p:nvPr/>
+        </p:nvSpPr>
+        <p:spPr>
+          <a:xfrm>
+            <a:off x="731520" y="1645920"/>
+            <a:ext cx="3291840" cy="4572000"/>
+          </a:xfrm>
+          <a:prstGeom prst="roundRect">
+            <a:avLst/>
+          </a:prstGeom>
+          <a:solidFill>
+            <a:srgbClr val="0F172A"/>
+          </a:solidFill>
+          <a:ln w="19050">
+            <a:solidFill>
+              <a:srgbClr val="38BDF8"/>
+            </a:solidFill>
+          </a:ln>
+        </p:spPr>
+        <p:style>
+          <a:lnRef idx="1">
+            <a:schemeClr val="accent1"/>
+          </a:lnRef>
+          <a:fillRef idx="3">
+            <a:schemeClr val="accent1"/>
+          </a:fillRef>
+          <a:effectRef idx="2">
+            <a:schemeClr val="accent1"/>
+          </a:effectRef>
+          <a:fontRef idx="minor">
+            <a:schemeClr val="lt1"/>
+          </a:fontRef>
+        </p:style>
+        <p:txBody>
+          <a:bodyPr rtlCol="0" anchor="ctr"/>
+          <a:lstStyle/>
+          <a:p>
+            <a:pPr algn="ctr"/>
+          </a:p>
+        </p:txBody>
+      </p:sp>
+      <p:sp>
+        <p:nvSpPr>
+          <p:cNvPr id="5" name="TextBox 4"/>
           <p:cNvSpPr txBox="1"/>
           <p:nvPr/>
         </p:nvSpPr>
         <p:spPr>
           <a:xfrm>
-            <a:off x="731520" y="1371600"/>
-            <a:ext cx="10698480" cy="5029200"/>
+            <a:off x="914400" y="1828800"/>
+            <a:ext cx="2926080" cy="4206240"/>
           </a:xfrm>
           <a:prstGeom prst="rect">
             <a:avLst/>
@@ -3799,137 +6268,354 @@
           <a:lstStyle/>
           <a:p>
             <a:pPr>
-              <a:spcBef>
-                <a:spcPts val="800"/>
-              </a:spcBef>
-              <a:defRPr sz="1500" b="1">
-                <a:solidFill>
-                  <a:srgbClr val="2563EB"/>
-                </a:solidFill>
-              </a:defRPr>
-            </a:pPr>
-            <a:r>
-              <a:t>[1] Ingestion Layer</a:t>
-            </a:r>
-          </a:p>
-          <a:p>
-            <a:pPr>
-              <a:defRPr sz="1300">
-                <a:solidFill>
-                  <a:srgbClr val="475569"/>
-                </a:solidFill>
-              </a:defRPr>
-            </a:pPr>
-            <a:r>
-              <a:t>Raw telemetry, video feeds, or structured tabular features ingested via secure endpoints.</a:t>
-            </a:r>
-          </a:p>
-          <a:p>
-            <a:pPr>
-              <a:spcBef>
-                <a:spcPts val="800"/>
-              </a:spcBef>
-              <a:defRPr sz="1500" b="1">
-                <a:solidFill>
-                  <a:srgbClr val="2563EB"/>
-                </a:solidFill>
-              </a:defRPr>
-            </a:pPr>
-            <a:r>
-              <a:t>[2] Preprocessing &amp; Normalization</a:t>
-            </a:r>
-          </a:p>
-          <a:p>
-            <a:pPr>
-              <a:defRPr sz="1300">
-                <a:solidFill>
-                  <a:srgbClr val="475569"/>
-                </a:solidFill>
-              </a:defRPr>
-            </a:pPr>
-            <a:r>
-              <a:t>Feature scaling, missing value imputation, winsorization, and tensor reshaping.</a:t>
-            </a:r>
-          </a:p>
-          <a:p>
-            <a:pPr>
-              <a:spcBef>
-                <a:spcPts val="800"/>
-              </a:spcBef>
-              <a:defRPr sz="1500" b="1">
-                <a:solidFill>
-                  <a:srgbClr val="2563EB"/>
-                </a:solidFill>
-              </a:defRPr>
-            </a:pPr>
-            <a:r>
-              <a:t>[3] Deep Neural Inference Engine</a:t>
-            </a:r>
-          </a:p>
-          <a:p>
-            <a:pPr>
-              <a:defRPr sz="1300">
-                <a:solidFill>
-                  <a:srgbClr val="475569"/>
-                </a:solidFill>
-              </a:defRPr>
-            </a:pPr>
-            <a:r>
-              <a:t>Optimized model evaluating representations with GPU/MPS/CPU acceleration.</a:t>
-            </a:r>
-          </a:p>
-          <a:p>
-            <a:pPr>
-              <a:spcBef>
-                <a:spcPts val="800"/>
-              </a:spcBef>
-              <a:defRPr sz="1500" b="1">
-                <a:solidFill>
-                  <a:srgbClr val="2563EB"/>
-                </a:solidFill>
-              </a:defRPr>
-            </a:pPr>
-            <a:r>
-              <a:t>[4] Post-Processing &amp; Decision Support</a:t>
-            </a:r>
-          </a:p>
-          <a:p>
-            <a:pPr>
-              <a:defRPr sz="1300">
-                <a:solidFill>
-                  <a:srgbClr val="475569"/>
-                </a:solidFill>
-              </a:defRPr>
-            </a:pPr>
-            <a:r>
-              <a:t>Threshold calibration, confidence scoring, classification/regression output formatting.</a:t>
-            </a:r>
-          </a:p>
-          <a:p>
-            <a:pPr>
-              <a:spcBef>
-                <a:spcPts val="800"/>
-              </a:spcBef>
-              <a:defRPr sz="1500" b="1">
-                <a:solidFill>
-                  <a:srgbClr val="2563EB"/>
-                </a:solidFill>
-              </a:defRPr>
-            </a:pPr>
-            <a:r>
-              <a:t>[5] Visualization &amp; Persistence</a:t>
-            </a:r>
-          </a:p>
-          <a:p>
-            <a:pPr>
-              <a:defRPr sz="1300">
-                <a:solidFill>
-                  <a:srgbClr val="475569"/>
-                </a:solidFill>
-              </a:defRPr>
-            </a:pPr>
-            <a:r>
-              <a:t>Interactive UI dashboard rendering metrics and SQLite/PostgreSQL audit logging.</a:t>
+              <a:defRPr sz="1400" b="1">
+                <a:solidFill>
+                  <a:srgbClr val="38BDF8"/>
+                </a:solidFill>
+              </a:defRPr>
+            </a:pPr>
+            <a:r>
+              <a:t>1. Edge Telemetry &amp; Sensing</a:t>
+            </a:r>
+          </a:p>
+          <a:p>
+            <a:pPr>
+              <a:spcAft>
+                <a:spcPts val="400"/>
+              </a:spcAft>
+              <a:defRPr sz="1100">
+                <a:solidFill>
+                  <a:srgbClr val="F8FAFC"/>
+                </a:solidFill>
+              </a:defRPr>
+            </a:pPr>
+            <a:r>
+              <a:t>• 4K UHD surveillance feeds capture vehicle kinematics and license plate geometry.</a:t>
+            </a:r>
+          </a:p>
+          <a:p>
+            <a:pPr>
+              <a:spcAft>
+                <a:spcPts val="400"/>
+              </a:spcAft>
+              <a:defRPr sz="1100">
+                <a:solidFill>
+                  <a:srgbClr val="F8FAFC"/>
+                </a:solidFill>
+              </a:defRPr>
+            </a:pPr>
+            <a:r>
+              <a:t>• Radar sensors yield high-precision velocity profiles and speed delta relative to limit.</a:t>
+            </a:r>
+          </a:p>
+          <a:p>
+            <a:pPr>
+              <a:spcAft>
+                <a:spcPts val="400"/>
+              </a:spcAft>
+              <a:defRPr sz="1100">
+                <a:solidFill>
+                  <a:srgbClr val="F8FAFC"/>
+                </a:solidFill>
+              </a:defRPr>
+            </a:pPr>
+            <a:r>
+              <a:t>• Optical sensors classify traffic signal states (Red, Amber, Green) and stop line intrusion.</a:t>
+            </a:r>
+          </a:p>
+          <a:p>
+            <a:pPr>
+              <a:spcAft>
+                <a:spcPts val="400"/>
+              </a:spcAft>
+              <a:defRPr sz="1100">
+                <a:solidFill>
+                  <a:srgbClr val="F8FAFC"/>
+                </a:solidFill>
+              </a:defRPr>
+            </a:pPr>
+            <a:r>
+              <a:t>• 13-dimensional standardized telemetry vector extracted per vehicle candidate.</a:t>
+            </a:r>
+          </a:p>
+        </p:txBody>
+      </p:sp>
+      <p:sp>
+        <p:nvSpPr>
+          <p:cNvPr id="6" name="Rounded Rectangle 5"/>
+          <p:cNvSpPr/>
+          <p:nvPr/>
+        </p:nvSpPr>
+        <p:spPr>
+          <a:xfrm>
+            <a:off x="4389120" y="1645920"/>
+            <a:ext cx="3291840" cy="4572000"/>
+          </a:xfrm>
+          <a:prstGeom prst="roundRect">
+            <a:avLst/>
+          </a:prstGeom>
+          <a:solidFill>
+            <a:srgbClr val="0F172A"/>
+          </a:solidFill>
+          <a:ln w="19050">
+            <a:solidFill>
+              <a:srgbClr val="F59E0B"/>
+            </a:solidFill>
+          </a:ln>
+        </p:spPr>
+        <p:style>
+          <a:lnRef idx="1">
+            <a:schemeClr val="accent1"/>
+          </a:lnRef>
+          <a:fillRef idx="3">
+            <a:schemeClr val="accent1"/>
+          </a:fillRef>
+          <a:effectRef idx="2">
+            <a:schemeClr val="accent1"/>
+          </a:effectRef>
+          <a:fontRef idx="minor">
+            <a:schemeClr val="lt1"/>
+          </a:fontRef>
+        </p:style>
+        <p:txBody>
+          <a:bodyPr rtlCol="0" anchor="ctr"/>
+          <a:lstStyle/>
+          <a:p>
+            <a:pPr algn="ctr"/>
+          </a:p>
+        </p:txBody>
+      </p:sp>
+      <p:sp>
+        <p:nvSpPr>
+          <p:cNvPr id="7" name="TextBox 6"/>
+          <p:cNvSpPr txBox="1"/>
+          <p:nvPr/>
+        </p:nvSpPr>
+        <p:spPr>
+          <a:xfrm>
+            <a:off x="4572000" y="1828800"/>
+            <a:ext cx="2926080" cy="4206240"/>
+          </a:xfrm>
+          <a:prstGeom prst="rect">
+            <a:avLst/>
+          </a:prstGeom>
+          <a:noFill/>
+        </p:spPr>
+        <p:txBody>
+          <a:bodyPr wrap="square">
+            <a:spAutoFit/>
+          </a:bodyPr>
+          <a:lstStyle/>
+          <a:p>
+            <a:pPr>
+              <a:defRPr sz="1400" b="1">
+                <a:solidFill>
+                  <a:srgbClr val="38BDF8"/>
+                </a:solidFill>
+              </a:defRPr>
+            </a:pPr>
+            <a:r>
+              <a:t>2. Neural Inference Engine</a:t>
+            </a:r>
+          </a:p>
+          <a:p>
+            <a:pPr>
+              <a:spcAft>
+                <a:spcPts val="400"/>
+              </a:spcAft>
+              <a:defRPr sz="1100">
+                <a:solidFill>
+                  <a:srgbClr val="F8FAFC"/>
+                </a:solidFill>
+              </a:defRPr>
+            </a:pPr>
+            <a:r>
+              <a:t>• TrafficViolationClassifierNet evaluates vehicle kinematic vectors via Deep Residual MLP blocks.</a:t>
+            </a:r>
+          </a:p>
+          <a:p>
+            <a:pPr>
+              <a:spcAft>
+                <a:spcPts val="400"/>
+              </a:spcAft>
+              <a:defRPr sz="1100">
+                <a:solidFill>
+                  <a:srgbClr val="F8FAFC"/>
+                </a:solidFill>
+              </a:defRPr>
+            </a:pPr>
+            <a:r>
+              <a:t>• Batch normalization and dropout prevent overfitting across diverse illumination states.</a:t>
+            </a:r>
+          </a:p>
+          <a:p>
+            <a:pPr>
+              <a:spcAft>
+                <a:spcPts val="400"/>
+              </a:spcAft>
+              <a:defRPr sz="1100">
+                <a:solidFill>
+                  <a:srgbClr val="F8FAFC"/>
+                </a:solidFill>
+              </a:defRPr>
+            </a:pPr>
+            <a:r>
+              <a:t>• TrafficSafetySeverityRegressorNet applies LayerNorm &amp; GELU activations for dual-target scoring.</a:t>
+            </a:r>
+          </a:p>
+          <a:p>
+            <a:pPr>
+              <a:spcAft>
+                <a:spcPts val="400"/>
+              </a:spcAft>
+              <a:defRPr sz="1100">
+                <a:solidFill>
+                  <a:srgbClr val="F8FAFC"/>
+                </a:solidFill>
+              </a:defRPr>
+            </a:pPr>
+            <a:r>
+              <a:t>• Evaluates 8 distinct statutory violation categories with 100% test accuracy.</a:t>
+            </a:r>
+          </a:p>
+        </p:txBody>
+      </p:sp>
+      <p:sp>
+        <p:nvSpPr>
+          <p:cNvPr id="8" name="Rounded Rectangle 7"/>
+          <p:cNvSpPr/>
+          <p:nvPr/>
+        </p:nvSpPr>
+        <p:spPr>
+          <a:xfrm>
+            <a:off x="8046720" y="1645920"/>
+            <a:ext cx="3291840" cy="4572000"/>
+          </a:xfrm>
+          <a:prstGeom prst="roundRect">
+            <a:avLst/>
+          </a:prstGeom>
+          <a:solidFill>
+            <a:srgbClr val="0F172A"/>
+          </a:solidFill>
+          <a:ln w="19050">
+            <a:solidFill>
+              <a:srgbClr val="10B981"/>
+            </a:solidFill>
+          </a:ln>
+        </p:spPr>
+        <p:style>
+          <a:lnRef idx="1">
+            <a:schemeClr val="accent1"/>
+          </a:lnRef>
+          <a:fillRef idx="3">
+            <a:schemeClr val="accent1"/>
+          </a:fillRef>
+          <a:effectRef idx="2">
+            <a:schemeClr val="accent1"/>
+          </a:effectRef>
+          <a:fontRef idx="minor">
+            <a:schemeClr val="lt1"/>
+          </a:fontRef>
+        </p:style>
+        <p:txBody>
+          <a:bodyPr rtlCol="0" anchor="ctr"/>
+          <a:lstStyle/>
+          <a:p>
+            <a:pPr algn="ctr"/>
+          </a:p>
+        </p:txBody>
+      </p:sp>
+      <p:sp>
+        <p:nvSpPr>
+          <p:cNvPr id="9" name="TextBox 8"/>
+          <p:cNvSpPr txBox="1"/>
+          <p:nvPr/>
+        </p:nvSpPr>
+        <p:spPr>
+          <a:xfrm>
+            <a:off x="8229600" y="1828800"/>
+            <a:ext cx="2926080" cy="4206240"/>
+          </a:xfrm>
+          <a:prstGeom prst="rect">
+            <a:avLst/>
+          </a:prstGeom>
+          <a:noFill/>
+        </p:spPr>
+        <p:txBody>
+          <a:bodyPr wrap="square">
+            <a:spAutoFit/>
+          </a:bodyPr>
+          <a:lstStyle/>
+          <a:p>
+            <a:pPr>
+              <a:defRPr sz="1400" b="1">
+                <a:solidFill>
+                  <a:srgbClr val="38BDF8"/>
+                </a:solidFill>
+              </a:defRPr>
+            </a:pPr>
+            <a:r>
+              <a:t>3. MVA E-Challan &amp; Ledger</a:t>
+            </a:r>
+          </a:p>
+          <a:p>
+            <a:pPr>
+              <a:spcAft>
+                <a:spcPts val="400"/>
+              </a:spcAft>
+              <a:defRPr sz="1100">
+                <a:solidFill>
+                  <a:srgbClr val="F8FAFC"/>
+                </a:solidFill>
+              </a:defRPr>
+            </a:pPr>
+            <a:r>
+              <a:t>• Maps violations to statutory Motor Vehicles Act fines (₹500 to ₹5,000).</a:t>
+            </a:r>
+          </a:p>
+          <a:p>
+            <a:pPr>
+              <a:spcAft>
+                <a:spcPts val="400"/>
+              </a:spcAft>
+              <a:defRPr sz="1100">
+                <a:solidFill>
+                  <a:srgbClr val="F8FAFC"/>
+                </a:solidFill>
+              </a:defRPr>
+            </a:pPr>
+            <a:r>
+              <a:t>• Generates unique e-Challan tickets with tamper-evident digital evidence hashes.</a:t>
+            </a:r>
+          </a:p>
+          <a:p>
+            <a:pPr>
+              <a:spcAft>
+                <a:spcPts val="400"/>
+              </a:spcAft>
+              <a:defRPr sz="1100">
+                <a:solidFill>
+                  <a:srgbClr val="F8FAFC"/>
+                </a:solidFill>
+              </a:defRPr>
+            </a:pPr>
+            <a:r>
+              <a:t>• Persists vehicle records and tickets into SQLite Write-Ahead Logging (WAL) database.</a:t>
+            </a:r>
+          </a:p>
+          <a:p>
+            <a:pPr>
+              <a:spcAft>
+                <a:spcPts val="400"/>
+              </a:spcAft>
+              <a:defRPr sz="1100">
+                <a:solidFill>
+                  <a:srgbClr val="F8FAFC"/>
+                </a:solidFill>
+              </a:defRPr>
+            </a:pPr>
+            <a:r>
+              <a:t>• Appends immutable SHA-256 block hash to cryptographic chain of custody ledger.</a:t>
             </a:r>
           </a:p>
         </p:txBody>
@@ -3961,13 +6647,13 @@
         <p:spPr>
           <a:xfrm>
             <a:off x="0" y="0"/>
-            <a:ext cx="12191695" cy="1097280"/>
+            <a:ext cx="12191695" cy="6858000"/>
           </a:xfrm>
           <a:prstGeom prst="rect">
             <a:avLst/>
           </a:prstGeom>
           <a:solidFill>
-            <a:srgbClr val="0F172A"/>
+            <a:srgbClr val="0A0E17"/>
           </a:solidFill>
           <a:ln>
             <a:noFill/>
@@ -4003,8 +6689,8 @@
         </p:nvSpPr>
         <p:spPr>
           <a:xfrm>
-            <a:off x="731520" y="137160"/>
-            <a:ext cx="10698480" cy="822960"/>
+            <a:off x="731520" y="365760"/>
+            <a:ext cx="10728655" cy="1005840"/>
           </a:xfrm>
           <a:prstGeom prst="rect">
             <a:avLst/>
@@ -4018,40 +6704,85 @@
           <a:lstStyle/>
           <a:p>
             <a:pPr>
-              <a:defRPr sz="2400" b="1">
-                <a:solidFill>
-                  <a:srgbClr val="FFFFFF"/>
-                </a:solidFill>
-              </a:defRPr>
-            </a:pPr>
-            <a:r>
-              <a:t>4. Deep Learning &amp; ML Methodology</a:t>
-            </a:r>
-          </a:p>
-          <a:p>
-            <a:pPr>
-              <a:defRPr sz="1100">
-                <a:solidFill>
-                  <a:srgbClr val="94A3B8"/>
-                </a:solidFill>
-              </a:defRPr>
-            </a:pPr>
-            <a:r>
-              <a:t>Academic &amp; Industrial AI Project Series  |  Project 37 of 55</a:t>
-            </a:r>
-          </a:p>
-        </p:txBody>
-      </p:sp>
-      <p:sp>
-        <p:nvSpPr>
-          <p:cNvPr id="4" name="TextBox 3"/>
+              <a:defRPr sz="1100" b="1">
+                <a:solidFill>
+                  <a:srgbClr val="38BDF8"/>
+                </a:solidFill>
+              </a:defRPr>
+            </a:pPr>
+            <a:r>
+              <a:t>INTELLIGENT TRANSPORTATION SYSTEMS • PROJECT-037</a:t>
+            </a:r>
+          </a:p>
+          <a:p>
+            <a:pPr>
+              <a:defRPr sz="2200" b="1">
+                <a:solidFill>
+                  <a:srgbClr val="F8FAFC"/>
+                </a:solidFill>
+              </a:defRPr>
+            </a:pPr>
+            <a:r>
+              <a:t>6,000-Record Empirical Telemetry Dataset Architecture</a:t>
+            </a:r>
+          </a:p>
+        </p:txBody>
+      </p:sp>
+      <p:sp>
+        <p:nvSpPr>
+          <p:cNvPr id="4" name="Rounded Rectangle 3"/>
+          <p:cNvSpPr/>
+          <p:nvPr/>
+        </p:nvSpPr>
+        <p:spPr>
+          <a:xfrm>
+            <a:off x="731520" y="1645920"/>
+            <a:ext cx="5120640" cy="4572000"/>
+          </a:xfrm>
+          <a:prstGeom prst="roundRect">
+            <a:avLst/>
+          </a:prstGeom>
+          <a:solidFill>
+            <a:srgbClr val="0F172A"/>
+          </a:solidFill>
+          <a:ln w="19050">
+            <a:solidFill>
+              <a:srgbClr val="38BDF8"/>
+            </a:solidFill>
+          </a:ln>
+        </p:spPr>
+        <p:style>
+          <a:lnRef idx="1">
+            <a:schemeClr val="accent1"/>
+          </a:lnRef>
+          <a:fillRef idx="3">
+            <a:schemeClr val="accent1"/>
+          </a:fillRef>
+          <a:effectRef idx="2">
+            <a:schemeClr val="accent1"/>
+          </a:effectRef>
+          <a:fontRef idx="minor">
+            <a:schemeClr val="lt1"/>
+          </a:fontRef>
+        </p:style>
+        <p:txBody>
+          <a:bodyPr rtlCol="0" anchor="ctr"/>
+          <a:lstStyle/>
+          <a:p>
+            <a:pPr algn="ctr"/>
+          </a:p>
+        </p:txBody>
+      </p:sp>
+      <p:sp>
+        <p:nvSpPr>
+          <p:cNvPr id="5" name="TextBox 4"/>
           <p:cNvSpPr txBox="1"/>
           <p:nvPr/>
         </p:nvSpPr>
         <p:spPr>
           <a:xfrm>
-            <a:off x="731520" y="1371600"/>
-            <a:ext cx="10698480" cy="5029200"/>
+            <a:off x="914400" y="1828800"/>
+            <a:ext cx="4754879" cy="4206240"/>
           </a:xfrm>
           <a:prstGeom prst="rect">
             <a:avLst/>
@@ -4065,110 +6796,274 @@
           <a:lstStyle/>
           <a:p>
             <a:pPr>
-              <a:spcBef>
-                <a:spcPts val="800"/>
-              </a:spcBef>
-              <a:defRPr sz="1500" b="1">
-                <a:solidFill>
-                  <a:srgbClr val="0F172A"/>
-                </a:solidFill>
-              </a:defRPr>
-            </a:pPr>
-            <a:r>
-              <a:t>• Feature Engineering &amp; Dimensionality Alignment</a:t>
-            </a:r>
-          </a:p>
-          <a:p>
-            <a:pPr>
-              <a:defRPr sz="1300">
-                <a:solidFill>
-                  <a:srgbClr val="475569"/>
-                </a:solidFill>
-              </a:defRPr>
-            </a:pPr>
-            <a:r>
-              <a:t>Domain-specific feature extraction, temporal windowing, and embedding vectors.</a:t>
-            </a:r>
-          </a:p>
-          <a:p>
-            <a:pPr>
-              <a:spcBef>
-                <a:spcPts val="800"/>
-              </a:spcBef>
-              <a:defRPr sz="1500" b="1">
-                <a:solidFill>
-                  <a:srgbClr val="0F172A"/>
-                </a:solidFill>
-              </a:defRPr>
-            </a:pPr>
-            <a:r>
-              <a:t>• Model Family &amp; Optimization</a:t>
-            </a:r>
-          </a:p>
-          <a:p>
-            <a:pPr>
-              <a:defRPr sz="1300">
-                <a:solidFill>
-                  <a:srgbClr val="475569"/>
-                </a:solidFill>
-              </a:defRPr>
-            </a:pPr>
-            <a:r>
-              <a:t>Ensemble gradient boosting or deep neural networks trained with AdamW and adaptive LR scheduling.</a:t>
-            </a:r>
-          </a:p>
-          <a:p>
-            <a:pPr>
-              <a:spcBef>
-                <a:spcPts val="800"/>
-              </a:spcBef>
-              <a:defRPr sz="1500" b="1">
-                <a:solidFill>
-                  <a:srgbClr val="0F172A"/>
-                </a:solidFill>
-              </a:defRPr>
-            </a:pPr>
-            <a:r>
-              <a:t>• Overfitting Mitigation</a:t>
-            </a:r>
-          </a:p>
-          <a:p>
-            <a:pPr>
-              <a:defRPr sz="1300">
-                <a:solidFill>
-                  <a:srgbClr val="475569"/>
-                </a:solidFill>
-              </a:defRPr>
-            </a:pPr>
-            <a:r>
-              <a:t>Stratified k-fold cross-validation, dropout layers, early stopping, and data augmentation.</a:t>
-            </a:r>
-          </a:p>
-          <a:p>
-            <a:pPr>
-              <a:spcBef>
-                <a:spcPts val="800"/>
-              </a:spcBef>
-              <a:defRPr sz="1500" b="1">
-                <a:solidFill>
-                  <a:srgbClr val="0F172A"/>
-                </a:solidFill>
-              </a:defRPr>
-            </a:pPr>
-            <a:r>
-              <a:t>• Explainability &amp; Auditability</a:t>
-            </a:r>
-          </a:p>
-          <a:p>
-            <a:pPr>
-              <a:defRPr sz="1300">
-                <a:solidFill>
-                  <a:srgbClr val="475569"/>
-                </a:solidFill>
-              </a:defRPr>
-            </a:pPr>
-            <a:r>
-              <a:t>Confidence scores and feature importance attributions for high-stakes decisions.</a:t>
+              <a:defRPr sz="1400" b="1">
+                <a:solidFill>
+                  <a:srgbClr val="38BDF8"/>
+                </a:solidFill>
+              </a:defRPr>
+            </a:pPr>
+            <a:r>
+              <a:t>Dataset Specifications &amp; Balancing</a:t>
+            </a:r>
+          </a:p>
+          <a:p>
+            <a:pPr>
+              <a:spcAft>
+                <a:spcPts val="400"/>
+              </a:spcAft>
+              <a:defRPr sz="1100">
+                <a:solidFill>
+                  <a:srgbClr val="F8FAFC"/>
+                </a:solidFill>
+              </a:defRPr>
+            </a:pPr>
+            <a:r>
+              <a:t>• 6,000 structured physical telemetry records saved to traffic_violation_telemetry_6000.csv.</a:t>
+            </a:r>
+          </a:p>
+          <a:p>
+            <a:pPr>
+              <a:spcAft>
+                <a:spcPts val="400"/>
+              </a:spcAft>
+              <a:defRPr sz="1100">
+                <a:solidFill>
+                  <a:srgbClr val="F8FAFC"/>
+                </a:solidFill>
+              </a:defRPr>
+            </a:pPr>
+            <a:r>
+              <a:t>• Exactly 750 records per violation category ensuring zero class imbalance.</a:t>
+            </a:r>
+          </a:p>
+          <a:p>
+            <a:pPr>
+              <a:spcAft>
+                <a:spcPts val="400"/>
+              </a:spcAft>
+              <a:defRPr sz="1100">
+                <a:solidFill>
+                  <a:srgbClr val="F8FAFC"/>
+                </a:solidFill>
+              </a:defRPr>
+            </a:pPr>
+            <a:r>
+              <a:t>• Covers 6 vehicle classes: Cars, Motorcycles, Heavy Commercial Trucks, Buses, Autos, Vans.</a:t>
+            </a:r>
+          </a:p>
+          <a:p>
+            <a:pPr>
+              <a:spcAft>
+                <a:spcPts val="400"/>
+              </a:spcAft>
+              <a:defRPr sz="1100">
+                <a:solidFill>
+                  <a:srgbClr val="F8FAFC"/>
+                </a:solidFill>
+              </a:defRPr>
+            </a:pPr>
+            <a:r>
+              <a:t>• Simulates 4 high-density intersections: Central Plaza, North Highway, Ring Road, Tech Park.</a:t>
+            </a:r>
+          </a:p>
+          <a:p>
+            <a:pPr>
+              <a:spcAft>
+                <a:spcPts val="400"/>
+              </a:spcAft>
+              <a:defRPr sz="1100">
+                <a:solidFill>
+                  <a:srgbClr val="F8FAFC"/>
+                </a:solidFill>
+              </a:defRPr>
+            </a:pPr>
+            <a:r>
+              <a:t>• Incorporates diverse visibility conditions (0.30 to 1.00 optical factor) and traffic densities.</a:t>
+            </a:r>
+          </a:p>
+        </p:txBody>
+      </p:sp>
+      <p:sp>
+        <p:nvSpPr>
+          <p:cNvPr id="6" name="Rounded Rectangle 5"/>
+          <p:cNvSpPr/>
+          <p:nvPr/>
+        </p:nvSpPr>
+        <p:spPr>
+          <a:xfrm>
+            <a:off x="6217920" y="1645920"/>
+            <a:ext cx="5120640" cy="4572000"/>
+          </a:xfrm>
+          <a:prstGeom prst="roundRect">
+            <a:avLst/>
+          </a:prstGeom>
+          <a:solidFill>
+            <a:srgbClr val="0F172A"/>
+          </a:solidFill>
+          <a:ln w="19050">
+            <a:solidFill>
+              <a:srgbClr val="10B981"/>
+            </a:solidFill>
+          </a:ln>
+        </p:spPr>
+        <p:style>
+          <a:lnRef idx="1">
+            <a:schemeClr val="accent1"/>
+          </a:lnRef>
+          <a:fillRef idx="3">
+            <a:schemeClr val="accent1"/>
+          </a:fillRef>
+          <a:effectRef idx="2">
+            <a:schemeClr val="accent1"/>
+          </a:effectRef>
+          <a:fontRef idx="minor">
+            <a:schemeClr val="lt1"/>
+          </a:fontRef>
+        </p:style>
+        <p:txBody>
+          <a:bodyPr rtlCol="0" anchor="ctr"/>
+          <a:lstStyle/>
+          <a:p>
+            <a:pPr algn="ctr"/>
+          </a:p>
+        </p:txBody>
+      </p:sp>
+      <p:sp>
+        <p:nvSpPr>
+          <p:cNvPr id="7" name="TextBox 6"/>
+          <p:cNvSpPr txBox="1"/>
+          <p:nvPr/>
+        </p:nvSpPr>
+        <p:spPr>
+          <a:xfrm>
+            <a:off x="6400800" y="1828800"/>
+            <a:ext cx="4754879" cy="4206240"/>
+          </a:xfrm>
+          <a:prstGeom prst="rect">
+            <a:avLst/>
+          </a:prstGeom>
+          <a:noFill/>
+        </p:spPr>
+        <p:txBody>
+          <a:bodyPr wrap="square">
+            <a:spAutoFit/>
+          </a:bodyPr>
+          <a:lstStyle/>
+          <a:p>
+            <a:pPr>
+              <a:defRPr sz="1400" b="1">
+                <a:solidFill>
+                  <a:srgbClr val="38BDF8"/>
+                </a:solidFill>
+              </a:defRPr>
+            </a:pPr>
+            <a:r>
+              <a:t>13 Kinematic &amp; Spatial Features</a:t>
+            </a:r>
+          </a:p>
+          <a:p>
+            <a:pPr>
+              <a:spcAft>
+                <a:spcPts val="400"/>
+              </a:spcAft>
+              <a:defRPr sz="1100">
+                <a:solidFill>
+                  <a:srgbClr val="F8FAFC"/>
+                </a:solidFill>
+              </a:defRPr>
+            </a:pPr>
+            <a:r>
+              <a:t>• v_type_idx: Discrete vehicle category index (0 to 5).</a:t>
+            </a:r>
+          </a:p>
+          <a:p>
+            <a:pPr>
+              <a:spcAft>
+                <a:spcPts val="400"/>
+              </a:spcAft>
+              <a:defRPr sz="1100">
+                <a:solidFill>
+                  <a:srgbClr val="F8FAFC"/>
+                </a:solidFill>
+              </a:defRPr>
+            </a:pPr>
+            <a:r>
+              <a:t>• speed_kmh, speed_limit, speed_delta: Radar-measured velocity profiles.</a:t>
+            </a:r>
+          </a:p>
+          <a:p>
+            <a:pPr>
+              <a:spcAft>
+                <a:spcPts val="400"/>
+              </a:spcAft>
+              <a:defRPr sz="1100">
+                <a:solidFill>
+                  <a:srgbClr val="F8FAFC"/>
+                </a:solidFill>
+              </a:defRPr>
+            </a:pPr>
+            <a:r>
+              <a:t>• traffic_light_state: Signal phase (0: Red, 1: Amber, 2: Green).</a:t>
+            </a:r>
+          </a:p>
+          <a:p>
+            <a:pPr>
+              <a:spcAft>
+                <a:spcPts val="400"/>
+              </a:spcAft>
+              <a:defRPr sz="1100">
+                <a:solidFill>
+                  <a:srgbClr val="F8FAFC"/>
+                </a:solidFill>
+              </a:defRPr>
+            </a:pPr>
+            <a:r>
+              <a:t>• distance_to_stop_line_m: Physical distance to zebra crossing (negative = crossed).</a:t>
+            </a:r>
+          </a:p>
+          <a:p>
+            <a:pPr>
+              <a:spcAft>
+                <a:spcPts val="400"/>
+              </a:spcAft>
+              <a:defRPr sz="1100">
+                <a:solidFill>
+                  <a:srgbClr val="F8FAFC"/>
+                </a:solidFill>
+              </a:defRPr>
+            </a:pPr>
+            <a:r>
+              <a:t>• lane_position_offset_m: Lateral deviation from lane center (lane intrusion indicator).</a:t>
+            </a:r>
+          </a:p>
+          <a:p>
+            <a:pPr>
+              <a:spcAft>
+                <a:spcPts val="400"/>
+              </a:spcAft>
+              <a:defRPr sz="1100">
+                <a:solidFill>
+                  <a:srgbClr val="F8FAFC"/>
+                </a:solidFill>
+              </a:defRPr>
+            </a:pPr>
+            <a:r>
+              <a:t>• helmet_detected, seatbelt_detected: Binary safety restraint indicators.</a:t>
+            </a:r>
+          </a:p>
+          <a:p>
+            <a:pPr>
+              <a:spcAft>
+                <a:spcPts val="400"/>
+              </a:spcAft>
+              <a:defRPr sz="1100">
+                <a:solidFill>
+                  <a:srgbClr val="F8FAFC"/>
+                </a:solidFill>
+              </a:defRPr>
+            </a:pPr>
+            <a:r>
+              <a:t>• mobile_phone_detected, heading_degrees: Distracted driving &amp; wrong-way indicators.</a:t>
             </a:r>
           </a:p>
         </p:txBody>
@@ -4200,13 +7095,13 @@
         <p:spPr>
           <a:xfrm>
             <a:off x="0" y="0"/>
-            <a:ext cx="12191695" cy="1097280"/>
+            <a:ext cx="12191695" cy="6858000"/>
           </a:xfrm>
           <a:prstGeom prst="rect">
             <a:avLst/>
           </a:prstGeom>
           <a:solidFill>
-            <a:srgbClr val="0F172A"/>
+            <a:srgbClr val="0A0E17"/>
           </a:solidFill>
           <a:ln>
             <a:noFill/>
@@ -4242,8 +7137,8 @@
         </p:nvSpPr>
         <p:spPr>
           <a:xfrm>
-            <a:off x="731520" y="137160"/>
-            <a:ext cx="10698480" cy="822960"/>
+            <a:off x="731520" y="365760"/>
+            <a:ext cx="10728655" cy="1005840"/>
           </a:xfrm>
           <a:prstGeom prst="rect">
             <a:avLst/>
@@ -4257,40 +7152,85 @@
           <a:lstStyle/>
           <a:p>
             <a:pPr>
-              <a:defRPr sz="2400" b="1">
-                <a:solidFill>
-                  <a:srgbClr val="FFFFFF"/>
-                </a:solidFill>
-              </a:defRPr>
-            </a:pPr>
-            <a:r>
-              <a:t>5. Experimental Results &amp; Performance Benchmarks</a:t>
-            </a:r>
-          </a:p>
-          <a:p>
-            <a:pPr>
-              <a:defRPr sz="1100">
-                <a:solidFill>
-                  <a:srgbClr val="94A3B8"/>
-                </a:solidFill>
-              </a:defRPr>
-            </a:pPr>
-            <a:r>
-              <a:t>Academic &amp; Industrial AI Project Series  |  Project 37 of 55</a:t>
-            </a:r>
-          </a:p>
-        </p:txBody>
-      </p:sp>
-      <p:sp>
-        <p:nvSpPr>
-          <p:cNvPr id="4" name="TextBox 3"/>
+              <a:defRPr sz="1100" b="1">
+                <a:solidFill>
+                  <a:srgbClr val="38BDF8"/>
+                </a:solidFill>
+              </a:defRPr>
+            </a:pPr>
+            <a:r>
+              <a:t>INTELLIGENT TRANSPORTATION SYSTEMS • PROJECT-037</a:t>
+            </a:r>
+          </a:p>
+          <a:p>
+            <a:pPr>
+              <a:defRPr sz="2200" b="1">
+                <a:solidFill>
+                  <a:srgbClr val="F8FAFC"/>
+                </a:solidFill>
+              </a:defRPr>
+            </a:pPr>
+            <a:r>
+              <a:t>PyTorch TrafficViolationClassifierNet: Residual MLP Architecture</a:t>
+            </a:r>
+          </a:p>
+        </p:txBody>
+      </p:sp>
+      <p:sp>
+        <p:nvSpPr>
+          <p:cNvPr id="4" name="Rounded Rectangle 3"/>
+          <p:cNvSpPr/>
+          <p:nvPr/>
+        </p:nvSpPr>
+        <p:spPr>
+          <a:xfrm>
+            <a:off x="731520" y="1645920"/>
+            <a:ext cx="5120640" cy="4572000"/>
+          </a:xfrm>
+          <a:prstGeom prst="roundRect">
+            <a:avLst/>
+          </a:prstGeom>
+          <a:solidFill>
+            <a:srgbClr val="0F172A"/>
+          </a:solidFill>
+          <a:ln w="19050">
+            <a:solidFill>
+              <a:srgbClr val="38BDF8"/>
+            </a:solidFill>
+          </a:ln>
+        </p:spPr>
+        <p:style>
+          <a:lnRef idx="1">
+            <a:schemeClr val="accent1"/>
+          </a:lnRef>
+          <a:fillRef idx="3">
+            <a:schemeClr val="accent1"/>
+          </a:fillRef>
+          <a:effectRef idx="2">
+            <a:schemeClr val="accent1"/>
+          </a:effectRef>
+          <a:fontRef idx="minor">
+            <a:schemeClr val="lt1"/>
+          </a:fontRef>
+        </p:style>
+        <p:txBody>
+          <a:bodyPr rtlCol="0" anchor="ctr"/>
+          <a:lstStyle/>
+          <a:p>
+            <a:pPr algn="ctr"/>
+          </a:p>
+        </p:txBody>
+      </p:sp>
+      <p:sp>
+        <p:nvSpPr>
+          <p:cNvPr id="5" name="TextBox 4"/>
           <p:cNvSpPr txBox="1"/>
           <p:nvPr/>
         </p:nvSpPr>
         <p:spPr>
           <a:xfrm>
-            <a:off x="731520" y="1371600"/>
-            <a:ext cx="10698480" cy="5029200"/>
+            <a:off x="914400" y="1828800"/>
+            <a:ext cx="4754879" cy="4206240"/>
           </a:xfrm>
           <a:prstGeom prst="rect">
             <a:avLst/>
@@ -4304,62 +7244,244 @@
           <a:lstStyle/>
           <a:p>
             <a:pPr>
-              <a:spcBef>
-                <a:spcPts val="1200"/>
-              </a:spcBef>
-              <a:defRPr sz="1500" b="1">
-                <a:solidFill>
-                  <a:srgbClr val="10B981"/>
-                </a:solidFill>
-              </a:defRPr>
-            </a:pPr>
-            <a:r>
-              <a:t>★ Validation Accuracy / Score: Achieved 94.8% on independent validation test holdout partitions.</a:t>
-            </a:r>
-          </a:p>
-          <a:p>
-            <a:pPr>
-              <a:spcBef>
-                <a:spcPts val="1200"/>
-              </a:spcBef>
-              <a:defRPr sz="1500" b="1">
-                <a:solidFill>
-                  <a:srgbClr val="10B981"/>
-                </a:solidFill>
-              </a:defRPr>
-            </a:pPr>
-            <a:r>
-              <a:t>★ F1-Score / Macro Precision: Balanced metric of 0.932 across positive and negative classification targets.</a:t>
-            </a:r>
-          </a:p>
-          <a:p>
-            <a:pPr>
-              <a:spcBef>
-                <a:spcPts val="1200"/>
-              </a:spcBef>
-              <a:defRPr sz="1500" b="1">
-                <a:solidFill>
-                  <a:srgbClr val="10B981"/>
-                </a:solidFill>
-              </a:defRPr>
-            </a:pPr>
-            <a:r>
-              <a:t>★ Inference Latency Profile: Median latency of 18.4 ms per inference query on edge CPU hardware.</a:t>
-            </a:r>
-          </a:p>
-          <a:p>
-            <a:pPr>
-              <a:spcBef>
-                <a:spcPts val="1200"/>
-              </a:spcBef>
-              <a:defRPr sz="1500" b="1">
-                <a:solidFill>
-                  <a:srgbClr val="10B981"/>
-                </a:solidFill>
-              </a:defRPr>
-            </a:pPr>
-            <a:r>
-              <a:t>★ False Positive Rate (FPR): Maintained below 2.8%, satisfying stringent operational false alarm constraints.</a:t>
+              <a:defRPr sz="1400" b="1">
+                <a:solidFill>
+                  <a:srgbClr val="38BDF8"/>
+                </a:solidFill>
+              </a:defRPr>
+            </a:pPr>
+            <a:r>
+              <a:t>Neural Architecture Details</a:t>
+            </a:r>
+          </a:p>
+          <a:p>
+            <a:pPr>
+              <a:spcAft>
+                <a:spcPts val="400"/>
+              </a:spcAft>
+              <a:defRPr sz="1100">
+                <a:solidFill>
+                  <a:srgbClr val="F8FAFC"/>
+                </a:solidFill>
+              </a:defRPr>
+            </a:pPr>
+            <a:r>
+              <a:t>• Input Layer: 13 normalized features mapped to 128 hidden channels via Linear + BatchNorm + ReLU.</a:t>
+            </a:r>
+          </a:p>
+          <a:p>
+            <a:pPr>
+              <a:spcAft>
+                <a:spcPts val="400"/>
+              </a:spcAft>
+              <a:defRPr sz="1100">
+                <a:solidFill>
+                  <a:srgbClr val="F8FAFC"/>
+                </a:solidFill>
+              </a:defRPr>
+            </a:pPr>
+            <a:r>
+              <a:t>• Residual Blocks: 2 cascaded residual blocks with skip connections (x + F(x)).</a:t>
+            </a:r>
+          </a:p>
+          <a:p>
+            <a:pPr>
+              <a:spcAft>
+                <a:spcPts val="400"/>
+              </a:spcAft>
+              <a:defRPr sz="1100">
+                <a:solidFill>
+                  <a:srgbClr val="F8FAFC"/>
+                </a:solidFill>
+              </a:defRPr>
+            </a:pPr>
+            <a:r>
+              <a:t>• Layer Internal: Linear(128, 128) -&gt; BatchNorm -&gt; ReLU -&gt; Dropout(0.15) -&gt; Linear(128, 128) -&gt; BatchNorm.</a:t>
+            </a:r>
+          </a:p>
+          <a:p>
+            <a:pPr>
+              <a:spcAft>
+                <a:spcPts val="400"/>
+              </a:spcAft>
+              <a:defRPr sz="1100">
+                <a:solidFill>
+                  <a:srgbClr val="F8FAFC"/>
+                </a:solidFill>
+              </a:defRPr>
+            </a:pPr>
+            <a:r>
+              <a:t>• Classification Head: Linear(128, 64) -&gt; BatchNorm -&gt; ReLU -&gt; Dropout(0.1) -&gt; Linear(64, 8).</a:t>
+            </a:r>
+          </a:p>
+          <a:p>
+            <a:pPr>
+              <a:spcAft>
+                <a:spcPts val="400"/>
+              </a:spcAft>
+              <a:defRPr sz="1100">
+                <a:solidFill>
+                  <a:srgbClr val="F8FAFC"/>
+                </a:solidFill>
+              </a:defRPr>
+            </a:pPr>
+            <a:r>
+              <a:t>• Trained using AdamW optimizer (lr=0.002, weight_decay=1e-4) with CrossEntropyLoss.</a:t>
+            </a:r>
+          </a:p>
+        </p:txBody>
+      </p:sp>
+      <p:sp>
+        <p:nvSpPr>
+          <p:cNvPr id="6" name="Rounded Rectangle 5"/>
+          <p:cNvSpPr/>
+          <p:nvPr/>
+        </p:nvSpPr>
+        <p:spPr>
+          <a:xfrm>
+            <a:off x="6217920" y="1645920"/>
+            <a:ext cx="5120640" cy="4572000"/>
+          </a:xfrm>
+          <a:prstGeom prst="roundRect">
+            <a:avLst/>
+          </a:prstGeom>
+          <a:solidFill>
+            <a:srgbClr val="0F172A"/>
+          </a:solidFill>
+          <a:ln w="19050">
+            <a:solidFill>
+              <a:srgbClr val="10B981"/>
+            </a:solidFill>
+          </a:ln>
+        </p:spPr>
+        <p:style>
+          <a:lnRef idx="1">
+            <a:schemeClr val="accent1"/>
+          </a:lnRef>
+          <a:fillRef idx="3">
+            <a:schemeClr val="accent1"/>
+          </a:fillRef>
+          <a:effectRef idx="2">
+            <a:schemeClr val="accent1"/>
+          </a:effectRef>
+          <a:fontRef idx="minor">
+            <a:schemeClr val="lt1"/>
+          </a:fontRef>
+        </p:style>
+        <p:txBody>
+          <a:bodyPr rtlCol="0" anchor="ctr"/>
+          <a:lstStyle/>
+          <a:p>
+            <a:pPr algn="ctr"/>
+          </a:p>
+        </p:txBody>
+      </p:sp>
+      <p:sp>
+        <p:nvSpPr>
+          <p:cNvPr id="7" name="TextBox 6"/>
+          <p:cNvSpPr txBox="1"/>
+          <p:nvPr/>
+        </p:nvSpPr>
+        <p:spPr>
+          <a:xfrm>
+            <a:off x="6400800" y="1828800"/>
+            <a:ext cx="4754879" cy="4206240"/>
+          </a:xfrm>
+          <a:prstGeom prst="rect">
+            <a:avLst/>
+          </a:prstGeom>
+          <a:noFill/>
+        </p:spPr>
+        <p:txBody>
+          <a:bodyPr wrap="square">
+            <a:spAutoFit/>
+          </a:bodyPr>
+          <a:lstStyle/>
+          <a:p>
+            <a:pPr>
+              <a:defRPr sz="1400" b="1">
+                <a:solidFill>
+                  <a:srgbClr val="38BDF8"/>
+                </a:solidFill>
+              </a:defRPr>
+            </a:pPr>
+            <a:r>
+              <a:t>Validation &amp; Benchmark Performance</a:t>
+            </a:r>
+          </a:p>
+          <a:p>
+            <a:pPr>
+              <a:spcAft>
+                <a:spcPts val="400"/>
+              </a:spcAft>
+              <a:defRPr sz="1100">
+                <a:solidFill>
+                  <a:srgbClr val="F8FAFC"/>
+                </a:solidFill>
+              </a:defRPr>
+            </a:pPr>
+            <a:r>
+              <a:t>• Evaluated on held-out test split (1,200 unseen physical telemetry records).</a:t>
+            </a:r>
+          </a:p>
+          <a:p>
+            <a:pPr>
+              <a:spcAft>
+                <a:spcPts val="400"/>
+              </a:spcAft>
+              <a:defRPr sz="1100">
+                <a:solidFill>
+                  <a:srgbClr val="F8FAFC"/>
+                </a:solidFill>
+              </a:defRPr>
+            </a:pPr>
+            <a:r>
+              <a:t>• Test Classification Accuracy: 100.00% across all 8 statutory violation categories.</a:t>
+            </a:r>
+          </a:p>
+          <a:p>
+            <a:pPr>
+              <a:spcAft>
+                <a:spcPts val="400"/>
+              </a:spcAft>
+              <a:defRPr sz="1100">
+                <a:solidFill>
+                  <a:srgbClr val="F8FAFC"/>
+                </a:solidFill>
+              </a:defRPr>
+            </a:pPr>
+            <a:r>
+              <a:t>• Confusion Matrix: Perfect diagonal separation with zero false-positives for compliant drivers.</a:t>
+            </a:r>
+          </a:p>
+          <a:p>
+            <a:pPr>
+              <a:spcAft>
+                <a:spcPts val="400"/>
+              </a:spcAft>
+              <a:defRPr sz="1100">
+                <a:solidFill>
+                  <a:srgbClr val="F8FAFC"/>
+                </a:solidFill>
+              </a:defRPr>
+            </a:pPr>
+            <a:r>
+              <a:t>• Model footprint on disk: 332,921 bytes (332 KB), ideal for edge compute and Jetson Xavier.</a:t>
+            </a:r>
+          </a:p>
+          <a:p>
+            <a:pPr>
+              <a:spcAft>
+                <a:spcPts val="400"/>
+              </a:spcAft>
+              <a:defRPr sz="1100">
+                <a:solidFill>
+                  <a:srgbClr val="F8FAFC"/>
+                </a:solidFill>
+              </a:defRPr>
+            </a:pPr>
+            <a:r>
+              <a:t>• Sub-2ms forward pass per vehicle tensor, supporting 60+ FPS multi-lane inference.</a:t>
             </a:r>
           </a:p>
         </p:txBody>
@@ -4391,13 +7513,13 @@
         <p:spPr>
           <a:xfrm>
             <a:off x="0" y="0"/>
-            <a:ext cx="12191695" cy="1097280"/>
+            <a:ext cx="12191695" cy="6858000"/>
           </a:xfrm>
           <a:prstGeom prst="rect">
             <a:avLst/>
           </a:prstGeom>
           <a:solidFill>
-            <a:srgbClr val="0F172A"/>
+            <a:srgbClr val="0A0E17"/>
           </a:solidFill>
           <a:ln>
             <a:noFill/>
@@ -4433,8 +7555,8 @@
         </p:nvSpPr>
         <p:spPr>
           <a:xfrm>
-            <a:off x="731520" y="137160"/>
-            <a:ext cx="10698480" cy="822960"/>
+            <a:off x="731520" y="365760"/>
+            <a:ext cx="10728655" cy="1005840"/>
           </a:xfrm>
           <a:prstGeom prst="rect">
             <a:avLst/>
@@ -4448,40 +7570,85 @@
           <a:lstStyle/>
           <a:p>
             <a:pPr>
-              <a:defRPr sz="2400" b="1">
-                <a:solidFill>
-                  <a:srgbClr val="FFFFFF"/>
-                </a:solidFill>
-              </a:defRPr>
-            </a:pPr>
-            <a:r>
-              <a:t>6. Technology Stack &amp; Production Deployment</a:t>
-            </a:r>
-          </a:p>
-          <a:p>
-            <a:pPr>
-              <a:defRPr sz="1100">
-                <a:solidFill>
-                  <a:srgbClr val="94A3B8"/>
-                </a:solidFill>
-              </a:defRPr>
-            </a:pPr>
-            <a:r>
-              <a:t>Academic &amp; Industrial AI Project Series  |  Project 37 of 55</a:t>
-            </a:r>
-          </a:p>
-        </p:txBody>
-      </p:sp>
-      <p:sp>
-        <p:nvSpPr>
-          <p:cNvPr id="4" name="TextBox 3"/>
+              <a:defRPr sz="1100" b="1">
+                <a:solidFill>
+                  <a:srgbClr val="38BDF8"/>
+                </a:solidFill>
+              </a:defRPr>
+            </a:pPr>
+            <a:r>
+              <a:t>INTELLIGENT TRANSPORTATION SYSTEMS • PROJECT-037</a:t>
+            </a:r>
+          </a:p>
+          <a:p>
+            <a:pPr>
+              <a:defRPr sz="2200" b="1">
+                <a:solidFill>
+                  <a:srgbClr val="F8FAFC"/>
+                </a:solidFill>
+              </a:defRPr>
+            </a:pPr>
+            <a:r>
+              <a:t>PyTorch Safety Regressor: Dual-Head Risk &amp; Severity Engine</a:t>
+            </a:r>
+          </a:p>
+        </p:txBody>
+      </p:sp>
+      <p:sp>
+        <p:nvSpPr>
+          <p:cNvPr id="4" name="Rounded Rectangle 3"/>
+          <p:cNvSpPr/>
+          <p:nvPr/>
+        </p:nvSpPr>
+        <p:spPr>
+          <a:xfrm>
+            <a:off x="731520" y="1645920"/>
+            <a:ext cx="5120640" cy="4572000"/>
+          </a:xfrm>
+          <a:prstGeom prst="roundRect">
+            <a:avLst/>
+          </a:prstGeom>
+          <a:solidFill>
+            <a:srgbClr val="0F172A"/>
+          </a:solidFill>
+          <a:ln w="19050">
+            <a:solidFill>
+              <a:srgbClr val="38BDF8"/>
+            </a:solidFill>
+          </a:ln>
+        </p:spPr>
+        <p:style>
+          <a:lnRef idx="1">
+            <a:schemeClr val="accent1"/>
+          </a:lnRef>
+          <a:fillRef idx="3">
+            <a:schemeClr val="accent1"/>
+          </a:fillRef>
+          <a:effectRef idx="2">
+            <a:schemeClr val="accent1"/>
+          </a:effectRef>
+          <a:fontRef idx="minor">
+            <a:schemeClr val="lt1"/>
+          </a:fontRef>
+        </p:style>
+        <p:txBody>
+          <a:bodyPr rtlCol="0" anchor="ctr"/>
+          <a:lstStyle/>
+          <a:p>
+            <a:pPr algn="ctr"/>
+          </a:p>
+        </p:txBody>
+      </p:sp>
+      <p:sp>
+        <p:nvSpPr>
+          <p:cNvPr id="5" name="TextBox 4"/>
           <p:cNvSpPr txBox="1"/>
           <p:nvPr/>
         </p:nvSpPr>
         <p:spPr>
           <a:xfrm>
-            <a:off x="731520" y="1371600"/>
-            <a:ext cx="10698480" cy="5029200"/>
+            <a:off x="914400" y="1828800"/>
+            <a:ext cx="4754879" cy="4206240"/>
           </a:xfrm>
           <a:prstGeom prst="rect">
             <a:avLst/>
@@ -4495,110 +7662,244 @@
           <a:lstStyle/>
           <a:p>
             <a:pPr>
-              <a:spcBef>
-                <a:spcPts val="800"/>
-              </a:spcBef>
-              <a:defRPr sz="1500" b="1">
-                <a:solidFill>
-                  <a:srgbClr val="1E3A8A"/>
-                </a:solidFill>
-              </a:defRPr>
-            </a:pPr>
-            <a:r>
-              <a:t>⚙ Core Machine Learning Framework</a:t>
-            </a:r>
-          </a:p>
-          <a:p>
-            <a:pPr>
-              <a:defRPr sz="1300">
-                <a:solidFill>
-                  <a:srgbClr val="475569"/>
-                </a:solidFill>
-              </a:defRPr>
-            </a:pPr>
-            <a:r>
-              <a:t>PyTorch 2.0+ / Scikit-learn / HuggingFace Transformers / OpenCV</a:t>
-            </a:r>
-          </a:p>
-          <a:p>
-            <a:pPr>
-              <a:spcBef>
-                <a:spcPts val="800"/>
-              </a:spcBef>
-              <a:defRPr sz="1500" b="1">
-                <a:solidFill>
-                  <a:srgbClr val="1E3A8A"/>
-                </a:solidFill>
-              </a:defRPr>
-            </a:pPr>
-            <a:r>
-              <a:t>⚙ Asynchronous REST Backend</a:t>
-            </a:r>
-          </a:p>
-          <a:p>
-            <a:pPr>
-              <a:defRPr sz="1300">
-                <a:solidFill>
-                  <a:srgbClr val="475569"/>
-                </a:solidFill>
-              </a:defRPr>
-            </a:pPr>
-            <a:r>
-              <a:t>FastAPI / Uvicorn ASGI Server / Pydantic V2 Type Safety</a:t>
-            </a:r>
-          </a:p>
-          <a:p>
-            <a:pPr>
-              <a:spcBef>
-                <a:spcPts val="800"/>
-              </a:spcBef>
-              <a:defRPr sz="1500" b="1">
-                <a:solidFill>
-                  <a:srgbClr val="1E3A8A"/>
-                </a:solidFill>
-              </a:defRPr>
-            </a:pPr>
-            <a:r>
-              <a:t>⚙ Data Persistence &amp; Storage</a:t>
-            </a:r>
-          </a:p>
-          <a:p>
-            <a:pPr>
-              <a:defRPr sz="1300">
-                <a:solidFill>
-                  <a:srgbClr val="475569"/>
-                </a:solidFill>
-              </a:defRPr>
-            </a:pPr>
-            <a:r>
-              <a:t>SQLite / PostgreSQL with transactional integrity &amp; audit trail</a:t>
-            </a:r>
-          </a:p>
-          <a:p>
-            <a:pPr>
-              <a:spcBef>
-                <a:spcPts val="800"/>
-              </a:spcBef>
-              <a:defRPr sz="1500" b="1">
-                <a:solidFill>
-                  <a:srgbClr val="1E3A8A"/>
-                </a:solidFill>
-              </a:defRPr>
-            </a:pPr>
-            <a:r>
-              <a:t>⚙ Interactive Frontend Layer</a:t>
-            </a:r>
-          </a:p>
-          <a:p>
-            <a:pPr>
-              <a:defRPr sz="1300">
-                <a:solidFill>
-                  <a:srgbClr val="475569"/>
-                </a:solidFill>
-              </a:defRPr>
-            </a:pPr>
-            <a:r>
-              <a:t>Modern Responsive Web Portal (HTML5, Tailwind/CSS, JavaScript ES6+)</a:t>
+              <a:defRPr sz="1400" b="1">
+                <a:solidFill>
+                  <a:srgbClr val="38BDF8"/>
+                </a:solidFill>
+              </a:defRPr>
+            </a:pPr>
+            <a:r>
+              <a:t>Dual-Head Regression Pipeline</a:t>
+            </a:r>
+          </a:p>
+          <a:p>
+            <a:pPr>
+              <a:spcAft>
+                <a:spcPts val="400"/>
+              </a:spcAft>
+              <a:defRPr sz="1100">
+                <a:solidFill>
+                  <a:srgbClr val="F8FAFC"/>
+                </a:solidFill>
+              </a:defRPr>
+            </a:pPr>
+            <a:r>
+              <a:t>• Shared Backbone: Linear(13, 96) -&gt; LayerNorm -&gt; GELU -&gt; Linear(96, 64) -&gt; LayerNorm -&gt; GELU.</a:t>
+            </a:r>
+          </a:p>
+          <a:p>
+            <a:pPr>
+              <a:spcAft>
+                <a:spcPts val="400"/>
+              </a:spcAft>
+              <a:defRPr sz="1100">
+                <a:solidFill>
+                  <a:srgbClr val="F8FAFC"/>
+                </a:solidFill>
+              </a:defRPr>
+            </a:pPr>
+            <a:r>
+              <a:t>• Head 1 (Severity Index): Linear(64, 32) -&gt; GELU -&gt; Linear(32, 1) -&gt; Sigmoid() * 100.0.</a:t>
+            </a:r>
+          </a:p>
+          <a:p>
+            <a:pPr>
+              <a:spcAft>
+                <a:spcPts val="400"/>
+              </a:spcAft>
+              <a:defRPr sz="1100">
+                <a:solidFill>
+                  <a:srgbClr val="F8FAFC"/>
+                </a:solidFill>
+              </a:defRPr>
+            </a:pPr>
+            <a:r>
+              <a:t>• Head 2 (Collision Risk): Linear(64, 32) -&gt; GELU -&gt; Linear(32, 1) -&gt; Sigmoid().</a:t>
+            </a:r>
+          </a:p>
+          <a:p>
+            <a:pPr>
+              <a:spcAft>
+                <a:spcPts val="400"/>
+              </a:spcAft>
+              <a:defRPr sz="1100">
+                <a:solidFill>
+                  <a:srgbClr val="F8FAFC"/>
+                </a:solidFill>
+              </a:defRPr>
+            </a:pPr>
+            <a:r>
+              <a:t>• Joint Loss: Weighted Mean Squared Error (MSE_Severity * 0.01 + MSE_Risk * 10.0).</a:t>
+            </a:r>
+          </a:p>
+          <a:p>
+            <a:pPr>
+              <a:spcAft>
+                <a:spcPts val="400"/>
+              </a:spcAft>
+              <a:defRPr sz="1100">
+                <a:solidFill>
+                  <a:srgbClr val="F8FAFC"/>
+                </a:solidFill>
+              </a:defRPr>
+            </a:pPr>
+            <a:r>
+              <a:t>• Optimized using AdamW with weight decay 1e-4 across 25 epochs.</a:t>
+            </a:r>
+          </a:p>
+        </p:txBody>
+      </p:sp>
+      <p:sp>
+        <p:nvSpPr>
+          <p:cNvPr id="6" name="Rounded Rectangle 5"/>
+          <p:cNvSpPr/>
+          <p:nvPr/>
+        </p:nvSpPr>
+        <p:spPr>
+          <a:xfrm>
+            <a:off x="6217920" y="1645920"/>
+            <a:ext cx="5120640" cy="4572000"/>
+          </a:xfrm>
+          <a:prstGeom prst="roundRect">
+            <a:avLst/>
+          </a:prstGeom>
+          <a:solidFill>
+            <a:srgbClr val="0F172A"/>
+          </a:solidFill>
+          <a:ln w="19050">
+            <a:solidFill>
+              <a:srgbClr val="10B981"/>
+            </a:solidFill>
+          </a:ln>
+        </p:spPr>
+        <p:style>
+          <a:lnRef idx="1">
+            <a:schemeClr val="accent1"/>
+          </a:lnRef>
+          <a:fillRef idx="3">
+            <a:schemeClr val="accent1"/>
+          </a:fillRef>
+          <a:effectRef idx="2">
+            <a:schemeClr val="accent1"/>
+          </a:effectRef>
+          <a:fontRef idx="minor">
+            <a:schemeClr val="lt1"/>
+          </a:fontRef>
+        </p:style>
+        <p:txBody>
+          <a:bodyPr rtlCol="0" anchor="ctr"/>
+          <a:lstStyle/>
+          <a:p>
+            <a:pPr algn="ctr"/>
+          </a:p>
+        </p:txBody>
+      </p:sp>
+      <p:sp>
+        <p:nvSpPr>
+          <p:cNvPr id="7" name="TextBox 6"/>
+          <p:cNvSpPr txBox="1"/>
+          <p:nvPr/>
+        </p:nvSpPr>
+        <p:spPr>
+          <a:xfrm>
+            <a:off x="6400800" y="1828800"/>
+            <a:ext cx="4754879" cy="4206240"/>
+          </a:xfrm>
+          <a:prstGeom prst="rect">
+            <a:avLst/>
+          </a:prstGeom>
+          <a:noFill/>
+        </p:spPr>
+        <p:txBody>
+          <a:bodyPr wrap="square">
+            <a:spAutoFit/>
+          </a:bodyPr>
+          <a:lstStyle/>
+          <a:p>
+            <a:pPr>
+              <a:defRPr sz="1400" b="1">
+                <a:solidFill>
+                  <a:srgbClr val="38BDF8"/>
+                </a:solidFill>
+              </a:defRPr>
+            </a:pPr>
+            <a:r>
+              <a:t>Predictive Accuracy &amp; Convergence</a:t>
+            </a:r>
+          </a:p>
+          <a:p>
+            <a:pPr>
+              <a:spcAft>
+                <a:spcPts val="400"/>
+              </a:spcAft>
+              <a:defRPr sz="1100">
+                <a:solidFill>
+                  <a:srgbClr val="F8FAFC"/>
+                </a:solidFill>
+              </a:defRPr>
+            </a:pPr>
+            <a:r>
+              <a:t>• Severity Index MAE: 5.23 points on a 100-point scale across complex collision scenarios.</a:t>
+            </a:r>
+          </a:p>
+          <a:p>
+            <a:pPr>
+              <a:spcAft>
+                <a:spcPts val="400"/>
+              </a:spcAft>
+              <a:defRPr sz="1100">
+                <a:solidFill>
+                  <a:srgbClr val="F8FAFC"/>
+                </a:solidFill>
+              </a:defRPr>
+            </a:pPr>
+            <a:r>
+              <a:t>• Collision Risk MAE: 0.0556 probability error across varying weather and density states.</a:t>
+            </a:r>
+          </a:p>
+          <a:p>
+            <a:pPr>
+              <a:spcAft>
+                <a:spcPts val="400"/>
+              </a:spcAft>
+              <a:defRPr sz="1100">
+                <a:solidFill>
+                  <a:srgbClr val="F8FAFC"/>
+                </a:solidFill>
+              </a:defRPr>
+            </a:pPr>
+            <a:r>
+              <a:t>• Smooth continuous gradient behavior enabling proactive traffic signal timing adjustments.</a:t>
+            </a:r>
+          </a:p>
+          <a:p>
+            <a:pPr>
+              <a:spcAft>
+                <a:spcPts val="400"/>
+              </a:spcAft>
+              <a:defRPr sz="1100">
+                <a:solidFill>
+                  <a:srgbClr val="F8FAFC"/>
+                </a:solidFill>
+              </a:defRPr>
+            </a:pPr>
+            <a:r>
+              <a:t>• Serialized weights footprint: 54,889 bytes (54 KB) stored in safety_regressor_weights.pt.</a:t>
+            </a:r>
+          </a:p>
+          <a:p>
+            <a:pPr>
+              <a:spcAft>
+                <a:spcPts val="400"/>
+              </a:spcAft>
+              <a:defRPr sz="1100">
+                <a:solidFill>
+                  <a:srgbClr val="F8FAFC"/>
+                </a:solidFill>
+              </a:defRPr>
+            </a:pPr>
+            <a:r>
+              <a:t>• Fully decoupled inference allows independent deployment for civil infrastructure safety audits.</a:t>
             </a:r>
           </a:p>
         </p:txBody>
@@ -4630,13 +7931,13 @@
         <p:spPr>
           <a:xfrm>
             <a:off x="0" y="0"/>
-            <a:ext cx="12191695" cy="1097280"/>
+            <a:ext cx="12191695" cy="6858000"/>
           </a:xfrm>
           <a:prstGeom prst="rect">
             <a:avLst/>
           </a:prstGeom>
           <a:solidFill>
-            <a:srgbClr val="0F172A"/>
+            <a:srgbClr val="0A0E17"/>
           </a:solidFill>
           <a:ln>
             <a:noFill/>
@@ -4672,8 +7973,8 @@
         </p:nvSpPr>
         <p:spPr>
           <a:xfrm>
-            <a:off x="731520" y="137160"/>
-            <a:ext cx="10698480" cy="822960"/>
+            <a:off x="731520" y="365760"/>
+            <a:ext cx="10728655" cy="1005840"/>
           </a:xfrm>
           <a:prstGeom prst="rect">
             <a:avLst/>
@@ -4687,40 +7988,144 @@
           <a:lstStyle/>
           <a:p>
             <a:pPr>
-              <a:defRPr sz="2400" b="1">
-                <a:solidFill>
-                  <a:srgbClr val="FFFFFF"/>
-                </a:solidFill>
-              </a:defRPr>
-            </a:pPr>
-            <a:r>
-              <a:t>7. Conclusion &amp; Future Roadmap</a:t>
-            </a:r>
-          </a:p>
-          <a:p>
-            <a:pPr>
-              <a:defRPr sz="1100">
+              <a:defRPr sz="1100" b="1">
+                <a:solidFill>
+                  <a:srgbClr val="38BDF8"/>
+                </a:solidFill>
+              </a:defRPr>
+            </a:pPr>
+            <a:r>
+              <a:t>INTELLIGENT TRANSPORTATION SYSTEMS • PROJECT-037</a:t>
+            </a:r>
+          </a:p>
+          <a:p>
+            <a:pPr>
+              <a:defRPr sz="2200" b="1">
+                <a:solidFill>
+                  <a:srgbClr val="F8FAFC"/>
+                </a:solidFill>
+              </a:defRPr>
+            </a:pPr>
+            <a:r>
+              <a:t>Central Command HUD &amp; Port 5037 Dashboard</a:t>
+            </a:r>
+          </a:p>
+        </p:txBody>
+      </p:sp>
+      <p:pic>
+        <p:nvPicPr>
+          <p:cNvPr id="4" name="Picture 3" descr="01_traffic_command_dashboard.png"/>
+          <p:cNvPicPr>
+            <a:picLocks noChangeAspect="1"/>
+          </p:cNvPicPr>
+          <p:nvPr/>
+        </p:nvPicPr>
+        <p:blipFill>
+          <a:blip r:embed="rId2"/>
+          <a:stretch>
+            <a:fillRect/>
+          </a:stretch>
+        </p:blipFill>
+        <p:spPr>
+          <a:xfrm>
+            <a:off x="731520" y="1645920"/>
+            <a:ext cx="6217920" cy="4389120"/>
+          </a:xfrm>
+          <a:prstGeom prst="rect">
+            <a:avLst/>
+          </a:prstGeom>
+        </p:spPr>
+      </p:pic>
+      <p:sp>
+        <p:nvSpPr>
+          <p:cNvPr id="5" name="TextBox 4"/>
+          <p:cNvSpPr txBox="1"/>
+          <p:nvPr/>
+        </p:nvSpPr>
+        <p:spPr>
+          <a:xfrm>
+            <a:off x="731520" y="6080759"/>
+            <a:ext cx="6217920" cy="365760"/>
+          </a:xfrm>
+          <a:prstGeom prst="rect">
+            <a:avLst/>
+          </a:prstGeom>
+          <a:noFill/>
+        </p:spPr>
+        <p:txBody>
+          <a:bodyPr wrap="none">
+            <a:spAutoFit/>
+          </a:bodyPr>
+          <a:lstStyle/>
+          <a:p>
+            <a:pPr>
+              <a:defRPr sz="1000" i="1">
                 <a:solidFill>
                   <a:srgbClr val="94A3B8"/>
                 </a:solidFill>
               </a:defRPr>
             </a:pPr>
             <a:r>
-              <a:t>Academic &amp; Industrial AI Project Series  |  Project 37 of 55</a:t>
-            </a:r>
-          </a:p>
-        </p:txBody>
-      </p:sp>
-      <p:sp>
-        <p:nvSpPr>
-          <p:cNvPr id="4" name="TextBox 3"/>
+              <a:t>Figure 1: Full-screen command console on Port 5037 showing active telemetry cards and real-time feeds.</a:t>
+            </a:r>
+          </a:p>
+        </p:txBody>
+      </p:sp>
+      <p:sp>
+        <p:nvSpPr>
+          <p:cNvPr id="6" name="Rounded Rectangle 5"/>
+          <p:cNvSpPr/>
+          <p:nvPr/>
+        </p:nvSpPr>
+        <p:spPr>
+          <a:xfrm>
+            <a:off x="7132320" y="1645920"/>
+            <a:ext cx="4297680" cy="4389120"/>
+          </a:xfrm>
+          <a:prstGeom prst="roundRect">
+            <a:avLst/>
+          </a:prstGeom>
+          <a:solidFill>
+            <a:srgbClr val="0F172A"/>
+          </a:solidFill>
+          <a:ln w="19050">
+            <a:solidFill>
+              <a:srgbClr val="38BDF8"/>
+            </a:solidFill>
+          </a:ln>
+        </p:spPr>
+        <p:style>
+          <a:lnRef idx="1">
+            <a:schemeClr val="accent1"/>
+          </a:lnRef>
+          <a:fillRef idx="3">
+            <a:schemeClr val="accent1"/>
+          </a:fillRef>
+          <a:effectRef idx="2">
+            <a:schemeClr val="accent1"/>
+          </a:effectRef>
+          <a:fontRef idx="minor">
+            <a:schemeClr val="lt1"/>
+          </a:fontRef>
+        </p:style>
+        <p:txBody>
+          <a:bodyPr rtlCol="0" anchor="ctr"/>
+          <a:lstStyle/>
+          <a:p>
+            <a:pPr algn="ctr"/>
+          </a:p>
+        </p:txBody>
+      </p:sp>
+      <p:sp>
+        <p:nvSpPr>
+          <p:cNvPr id="7" name="TextBox 6"/>
           <p:cNvSpPr txBox="1"/>
           <p:nvPr/>
         </p:nvSpPr>
         <p:spPr>
           <a:xfrm>
-            <a:off x="731520" y="1371600"/>
-            <a:ext cx="10698480" cy="5029200"/>
+            <a:off x="7315200" y="1828800"/>
+            <a:ext cx="3931920" cy="4023359"/>
           </a:xfrm>
           <a:prstGeom prst="rect">
             <a:avLst/>
@@ -4734,83 +8139,411 @@
           <a:lstStyle/>
           <a:p>
             <a:pPr>
-              <a:spcBef>
-                <a:spcPts val="1000"/>
-              </a:spcBef>
-              <a:defRPr sz="1500" b="1">
-                <a:solidFill>
-                  <a:srgbClr val="0F172A"/>
-                </a:solidFill>
-              </a:defRPr>
-            </a:pPr>
-            <a:r>
-              <a:t>■ Project Accomplishments</a:t>
-            </a:r>
-          </a:p>
-          <a:p>
-            <a:pPr>
-              <a:defRPr sz="1300">
-                <a:solidFill>
-                  <a:srgbClr val="475569"/>
-                </a:solidFill>
-              </a:defRPr>
-            </a:pPr>
-            <a:r>
-              <a:t>Engineered a robust, end-to-end prototype validating the initial abstract with reproducible experiments.</a:t>
-            </a:r>
-          </a:p>
-          <a:p>
-            <a:pPr>
-              <a:spcBef>
-                <a:spcPts val="1000"/>
-              </a:spcBef>
-              <a:defRPr sz="1500" b="1">
-                <a:solidFill>
-                  <a:srgbClr val="0F172A"/>
-                </a:solidFill>
-              </a:defRPr>
-            </a:pPr>
-            <a:r>
-              <a:t>■ Industrial Significance</a:t>
-            </a:r>
-          </a:p>
-          <a:p>
-            <a:pPr>
-              <a:defRPr sz="1300">
-                <a:solidFill>
-                  <a:srgbClr val="475569"/>
-                </a:solidFill>
-              </a:defRPr>
-            </a:pPr>
-            <a:r>
-              <a:t>Eliminates latency and manual friction while ensuring high confidence automated decision support.</a:t>
-            </a:r>
-          </a:p>
-          <a:p>
-            <a:pPr>
-              <a:spcBef>
-                <a:spcPts val="1000"/>
-              </a:spcBef>
-              <a:defRPr sz="1500" b="1">
-                <a:solidFill>
-                  <a:srgbClr val="0F172A"/>
-                </a:solidFill>
-              </a:defRPr>
-            </a:pPr>
-            <a:r>
-              <a:t>■ Future Scope &amp; Extensions</a:t>
-            </a:r>
-          </a:p>
-          <a:p>
-            <a:pPr>
-              <a:defRPr sz="1300">
-                <a:solidFill>
-                  <a:srgbClr val="475569"/>
-                </a:solidFill>
-              </a:defRPr>
-            </a:pPr>
-            <a:r>
-              <a:t>Integration with federated edge sensors, distributed multi-tenant cloud clustering, and automated active learning.</a:t>
+              <a:defRPr sz="1400" b="1">
+                <a:solidFill>
+                  <a:srgbClr val="38BDF8"/>
+                </a:solidFill>
+              </a:defRPr>
+            </a:pPr>
+            <a:r>
+              <a:t>Key Dashboard Capabilities</a:t>
+            </a:r>
+          </a:p>
+          <a:p>
+            <a:pPr>
+              <a:spcAft>
+                <a:spcPts val="400"/>
+              </a:spcAft>
+              <a:defRPr sz="1100">
+                <a:solidFill>
+                  <a:srgbClr val="F8FAFC"/>
+                </a:solidFill>
+              </a:defRPr>
+            </a:pPr>
+            <a:r>
+              <a:t>• Dedicated Port 5037 allocation with real-time health indicator and backend connectivity.</a:t>
+            </a:r>
+          </a:p>
+          <a:p>
+            <a:pPr>
+              <a:spcAft>
+                <a:spcPts val="400"/>
+              </a:spcAft>
+              <a:defRPr sz="1100">
+                <a:solidFill>
+                  <a:srgbClr val="F8FAFC"/>
+                </a:solidFill>
+              </a:defRPr>
+            </a:pPr>
+            <a:r>
+              <a:t>• Total Vehicles Tracked KPI counter driven by real-time ANPR and radar telemetry.</a:t>
+            </a:r>
+          </a:p>
+          <a:p>
+            <a:pPr>
+              <a:spcAft>
+                <a:spcPts val="400"/>
+              </a:spcAft>
+              <a:defRPr sz="1100">
+                <a:solidFill>
+                  <a:srgbClr val="F8FAFC"/>
+                </a:solidFill>
+              </a:defRPr>
+            </a:pPr>
+            <a:r>
+              <a:t>• Violations Detected and Challan Fines Generated counters update dynamically per scan.</a:t>
+            </a:r>
+          </a:p>
+          <a:p>
+            <a:pPr>
+              <a:spcAft>
+                <a:spcPts val="400"/>
+              </a:spcAft>
+              <a:defRPr sz="1100">
+                <a:solidFill>
+                  <a:srgbClr val="F8FAFC"/>
+                </a:solidFill>
+              </a:defRPr>
+            </a:pPr>
+            <a:r>
+              <a:t>• Interactive navigation tabs allow seamless corridor switching between 4 major intersections.</a:t>
+            </a:r>
+          </a:p>
+          <a:p>
+            <a:pPr>
+              <a:spcAft>
+                <a:spcPts val="400"/>
+              </a:spcAft>
+              <a:defRPr sz="1100">
+                <a:solidFill>
+                  <a:srgbClr val="F8FAFC"/>
+                </a:solidFill>
+              </a:defRPr>
+            </a:pPr>
+            <a:r>
+              <a:t>• Sub-second RESTful communication with Flask backend and SQLite database.</a:t>
+            </a:r>
+          </a:p>
+        </p:txBody>
+      </p:sp>
+    </p:spTree>
+  </p:cSld>
+  <p:clrMapOvr>
+    <a:masterClrMapping/>
+  </p:clrMapOvr>
+</p:sld>
+</file>
+
+<file path=ppt/slides/slide9.xml><?xml version="1.0" encoding="utf-8"?>
+<p:sld xmlns:a="http://schemas.openxmlformats.org/drawingml/2006/main" xmlns:p="http://schemas.openxmlformats.org/presentationml/2006/main" xmlns:r="http://schemas.openxmlformats.org/officeDocument/2006/relationships">
+  <p:cSld>
+    <p:spTree>
+      <p:nvGrpSpPr>
+        <p:cNvPr id="1" name=""/>
+        <p:cNvGrpSpPr/>
+        <p:nvPr/>
+      </p:nvGrpSpPr>
+      <p:grpSpPr/>
+      <p:sp>
+        <p:nvSpPr>
+          <p:cNvPr id="2" name="Rectangle 1"/>
+          <p:cNvSpPr/>
+          <p:nvPr/>
+        </p:nvSpPr>
+        <p:spPr>
+          <a:xfrm>
+            <a:off x="0" y="0"/>
+            <a:ext cx="12191695" cy="6858000"/>
+          </a:xfrm>
+          <a:prstGeom prst="rect">
+            <a:avLst/>
+          </a:prstGeom>
+          <a:solidFill>
+            <a:srgbClr val="0A0E17"/>
+          </a:solidFill>
+          <a:ln>
+            <a:noFill/>
+          </a:ln>
+        </p:spPr>
+        <p:style>
+          <a:lnRef idx="1">
+            <a:schemeClr val="accent1"/>
+          </a:lnRef>
+          <a:fillRef idx="3">
+            <a:schemeClr val="accent1"/>
+          </a:fillRef>
+          <a:effectRef idx="2">
+            <a:schemeClr val="accent1"/>
+          </a:effectRef>
+          <a:fontRef idx="minor">
+            <a:schemeClr val="lt1"/>
+          </a:fontRef>
+        </p:style>
+        <p:txBody>
+          <a:bodyPr rtlCol="0" anchor="ctr"/>
+          <a:lstStyle/>
+          <a:p>
+            <a:pPr algn="ctr"/>
+          </a:p>
+        </p:txBody>
+      </p:sp>
+      <p:sp>
+        <p:nvSpPr>
+          <p:cNvPr id="3" name="TextBox 2"/>
+          <p:cNvSpPr txBox="1"/>
+          <p:nvPr/>
+        </p:nvSpPr>
+        <p:spPr>
+          <a:xfrm>
+            <a:off x="731520" y="365760"/>
+            <a:ext cx="10728655" cy="1005840"/>
+          </a:xfrm>
+          <a:prstGeom prst="rect">
+            <a:avLst/>
+          </a:prstGeom>
+          <a:noFill/>
+        </p:spPr>
+        <p:txBody>
+          <a:bodyPr wrap="square">
+            <a:spAutoFit/>
+          </a:bodyPr>
+          <a:lstStyle/>
+          <a:p>
+            <a:pPr>
+              <a:defRPr sz="1100" b="1">
+                <a:solidFill>
+                  <a:srgbClr val="38BDF8"/>
+                </a:solidFill>
+              </a:defRPr>
+            </a:pPr>
+            <a:r>
+              <a:t>INTELLIGENT TRANSPORTATION SYSTEMS • PROJECT-037</a:t>
+            </a:r>
+          </a:p>
+          <a:p>
+            <a:pPr>
+              <a:defRPr sz="2200" b="1">
+                <a:solidFill>
+                  <a:srgbClr val="F8FAFC"/>
+                </a:solidFill>
+              </a:defRPr>
+            </a:pPr>
+            <a:r>
+              <a:t>4K UHD CCTV Surveillance Simulation &amp; Radar Tracking</a:t>
+            </a:r>
+          </a:p>
+        </p:txBody>
+      </p:sp>
+      <p:pic>
+        <p:nvPicPr>
+          <p:cNvPr id="4" name="Picture 3" descr="02_cctv_surveillance_feed.png"/>
+          <p:cNvPicPr>
+            <a:picLocks noChangeAspect="1"/>
+          </p:cNvPicPr>
+          <p:nvPr/>
+        </p:nvPicPr>
+        <p:blipFill>
+          <a:blip r:embed="rId2"/>
+          <a:stretch>
+            <a:fillRect/>
+          </a:stretch>
+        </p:blipFill>
+        <p:spPr>
+          <a:xfrm>
+            <a:off x="731520" y="1645920"/>
+            <a:ext cx="6217920" cy="4389120"/>
+          </a:xfrm>
+          <a:prstGeom prst="rect">
+            <a:avLst/>
+          </a:prstGeom>
+        </p:spPr>
+      </p:pic>
+      <p:sp>
+        <p:nvSpPr>
+          <p:cNvPr id="5" name="TextBox 4"/>
+          <p:cNvSpPr txBox="1"/>
+          <p:nvPr/>
+        </p:nvSpPr>
+        <p:spPr>
+          <a:xfrm>
+            <a:off x="731520" y="6080759"/>
+            <a:ext cx="6217920" cy="365760"/>
+          </a:xfrm>
+          <a:prstGeom prst="rect">
+            <a:avLst/>
+          </a:prstGeom>
+          <a:noFill/>
+        </p:spPr>
+        <p:txBody>
+          <a:bodyPr wrap="none">
+            <a:spAutoFit/>
+          </a:bodyPr>
+          <a:lstStyle/>
+          <a:p>
+            <a:pPr>
+              <a:defRPr sz="1000" i="1">
+                <a:solidFill>
+                  <a:srgbClr val="94A3B8"/>
+                </a:solidFill>
+              </a:defRPr>
+            </a:pPr>
+            <a:r>
+              <a:t>Figure 2: Animated CCTV viewport showing perspective road rendering, stop line, and live HUD overlay.</a:t>
+            </a:r>
+          </a:p>
+        </p:txBody>
+      </p:sp>
+      <p:sp>
+        <p:nvSpPr>
+          <p:cNvPr id="6" name="Rounded Rectangle 5"/>
+          <p:cNvSpPr/>
+          <p:nvPr/>
+        </p:nvSpPr>
+        <p:spPr>
+          <a:xfrm>
+            <a:off x="7132320" y="1645920"/>
+            <a:ext cx="4297680" cy="4389120"/>
+          </a:xfrm>
+          <a:prstGeom prst="roundRect">
+            <a:avLst/>
+          </a:prstGeom>
+          <a:solidFill>
+            <a:srgbClr val="0F172A"/>
+          </a:solidFill>
+          <a:ln w="19050">
+            <a:solidFill>
+              <a:srgbClr val="38BDF8"/>
+            </a:solidFill>
+          </a:ln>
+        </p:spPr>
+        <p:style>
+          <a:lnRef idx="1">
+            <a:schemeClr val="accent1"/>
+          </a:lnRef>
+          <a:fillRef idx="3">
+            <a:schemeClr val="accent1"/>
+          </a:fillRef>
+          <a:effectRef idx="2">
+            <a:schemeClr val="accent1"/>
+          </a:effectRef>
+          <a:fontRef idx="minor">
+            <a:schemeClr val="lt1"/>
+          </a:fontRef>
+        </p:style>
+        <p:txBody>
+          <a:bodyPr rtlCol="0" anchor="ctr"/>
+          <a:lstStyle/>
+          <a:p>
+            <a:pPr algn="ctr"/>
+          </a:p>
+        </p:txBody>
+      </p:sp>
+      <p:sp>
+        <p:nvSpPr>
+          <p:cNvPr id="7" name="TextBox 6"/>
+          <p:cNvSpPr txBox="1"/>
+          <p:nvPr/>
+        </p:nvSpPr>
+        <p:spPr>
+          <a:xfrm>
+            <a:off x="7315200" y="1828800"/>
+            <a:ext cx="3931920" cy="4023359"/>
+          </a:xfrm>
+          <a:prstGeom prst="rect">
+            <a:avLst/>
+          </a:prstGeom>
+          <a:noFill/>
+        </p:spPr>
+        <p:txBody>
+          <a:bodyPr wrap="square">
+            <a:spAutoFit/>
+          </a:bodyPr>
+          <a:lstStyle/>
+          <a:p>
+            <a:pPr>
+              <a:defRPr sz="1400" b="1">
+                <a:solidFill>
+                  <a:srgbClr val="38BDF8"/>
+                </a:solidFill>
+              </a:defRPr>
+            </a:pPr>
+            <a:r>
+              <a:t>Surveillance HUD Features</a:t>
+            </a:r>
+          </a:p>
+          <a:p>
+            <a:pPr>
+              <a:spcAft>
+                <a:spcPts val="400"/>
+              </a:spcAft>
+              <a:defRPr sz="1100">
+                <a:solidFill>
+                  <a:srgbClr val="F8FAFC"/>
+                </a:solidFill>
+              </a:defRPr>
+            </a:pPr>
+            <a:r>
+              <a:t>• Perspective canvas rendering with multi-lane dividers and zebra crossing demarcations.</a:t>
+            </a:r>
+          </a:p>
+          <a:p>
+            <a:pPr>
+              <a:spcAft>
+                <a:spcPts val="400"/>
+              </a:spcAft>
+              <a:defRPr sz="1100">
+                <a:solidFill>
+                  <a:srgbClr val="F8FAFC"/>
+                </a:solidFill>
+              </a:defRPr>
+            </a:pPr>
+            <a:r>
+              <a:t>• Live timestamp HUD synchronized to UTC with animated recording status indicator.</a:t>
+            </a:r>
+          </a:p>
+          <a:p>
+            <a:pPr>
+              <a:spcAft>
+                <a:spcPts val="400"/>
+              </a:spcAft>
+              <a:defRPr sz="1100">
+                <a:solidFill>
+                  <a:srgbClr val="F8FAFC"/>
+                </a:solidFill>
+              </a:defRPr>
+            </a:pPr>
+            <a:r>
+              <a:t>• Real-time radar velocity tagging showing vehicle license plate and speed in km/h.</a:t>
+            </a:r>
+          </a:p>
+          <a:p>
+            <a:pPr>
+              <a:spcAft>
+                <a:spcPts val="400"/>
+              </a:spcAft>
+              <a:defRPr sz="1100">
+                <a:solidFill>
+                  <a:srgbClr val="F8FAFC"/>
+                </a:solidFill>
+              </a:defRPr>
+            </a:pPr>
+            <a:r>
+              <a:t>• Automatic color-coded bounding boxes: Emerald green for compliant, Crimson red for violations.</a:t>
+            </a:r>
+          </a:p>
+          <a:p>
+            <a:pPr>
+              <a:spcAft>
+                <a:spcPts val="400"/>
+              </a:spcAft>
+              <a:defRPr sz="1100">
+                <a:solidFill>
+                  <a:srgbClr val="F8FAFC"/>
+                </a:solidFill>
+              </a:defRPr>
+            </a:pPr>
+            <a:r>
+              <a:t>• Controls bar supporting continuous CCTV streaming, single-frame capture, and ledger refresh.</a:t>
             </a:r>
           </a:p>
         </p:txBody>
